--- a/Lectures/Lecture5-ModelSelection.pptx
+++ b/Lectures/Lecture5-ModelSelection.pptx
@@ -6,19 +6,19 @@
     <p:sldMasterId id="2147483660" r:id="rId2"/>
   </p:sldMasterIdLst>
   <p:notesMasterIdLst>
-    <p:notesMasterId r:id="rId53"/>
+    <p:notesMasterId r:id="rId52"/>
   </p:notesMasterIdLst>
   <p:sldIdLst>
     <p:sldId id="256" r:id="rId3"/>
-    <p:sldId id="471" r:id="rId4"/>
+    <p:sldId id="486" r:id="rId4"/>
     <p:sldId id="492" r:id="rId5"/>
-    <p:sldId id="497" r:id="rId6"/>
-    <p:sldId id="486" r:id="rId7"/>
-    <p:sldId id="323" r:id="rId8"/>
-    <p:sldId id="286" r:id="rId9"/>
-    <p:sldId id="472" r:id="rId10"/>
-    <p:sldId id="287" r:id="rId11"/>
-    <p:sldId id="478" r:id="rId12"/>
+    <p:sldId id="557" r:id="rId6"/>
+    <p:sldId id="323" r:id="rId7"/>
+    <p:sldId id="286" r:id="rId8"/>
+    <p:sldId id="472" r:id="rId9"/>
+    <p:sldId id="287" r:id="rId10"/>
+    <p:sldId id="478" r:id="rId11"/>
+    <p:sldId id="558" r:id="rId12"/>
     <p:sldId id="468" r:id="rId13"/>
     <p:sldId id="473" r:id="rId14"/>
     <p:sldId id="288" r:id="rId15"/>
@@ -42,28 +42,27 @@
     <p:sldId id="483" r:id="rId33"/>
     <p:sldId id="489" r:id="rId34"/>
     <p:sldId id="487" r:id="rId35"/>
-    <p:sldId id="557" r:id="rId36"/>
-    <p:sldId id="556" r:id="rId37"/>
-    <p:sldId id="488" r:id="rId38"/>
-    <p:sldId id="289" r:id="rId39"/>
-    <p:sldId id="290" r:id="rId40"/>
-    <p:sldId id="291" r:id="rId41"/>
-    <p:sldId id="292" r:id="rId42"/>
-    <p:sldId id="293" r:id="rId43"/>
-    <p:sldId id="469" r:id="rId44"/>
-    <p:sldId id="470" r:id="rId45"/>
-    <p:sldId id="296" r:id="rId46"/>
-    <p:sldId id="454" r:id="rId47"/>
-    <p:sldId id="550" r:id="rId48"/>
-    <p:sldId id="533" r:id="rId49"/>
-    <p:sldId id="543" r:id="rId50"/>
-    <p:sldId id="554" r:id="rId51"/>
-    <p:sldId id="531" r:id="rId52"/>
+    <p:sldId id="556" r:id="rId36"/>
+    <p:sldId id="488" r:id="rId37"/>
+    <p:sldId id="289" r:id="rId38"/>
+    <p:sldId id="290" r:id="rId39"/>
+    <p:sldId id="291" r:id="rId40"/>
+    <p:sldId id="292" r:id="rId41"/>
+    <p:sldId id="293" r:id="rId42"/>
+    <p:sldId id="469" r:id="rId43"/>
+    <p:sldId id="470" r:id="rId44"/>
+    <p:sldId id="296" r:id="rId45"/>
+    <p:sldId id="454" r:id="rId46"/>
+    <p:sldId id="550" r:id="rId47"/>
+    <p:sldId id="533" r:id="rId48"/>
+    <p:sldId id="543" r:id="rId49"/>
+    <p:sldId id="554" r:id="rId50"/>
+    <p:sldId id="531" r:id="rId51"/>
   </p:sldIdLst>
   <p:sldSz cx="12192000" cy="6858000"/>
   <p:notesSz cx="6858000" cy="9144000"/>
   <p:custDataLst>
-    <p:tags r:id="rId54"/>
+    <p:tags r:id="rId53"/>
   </p:custDataLst>
   <p:defaultTextStyle>
     <a:defPPr marR="0" lvl="0" algn="l" rtl="0">
@@ -300,15 +299,15 @@
         <p14:section name="Default Section" id="{C122D811-96CB-9F49-A8AB-CD2D1B40ED98}">
           <p14:sldIdLst>
             <p14:sldId id="256"/>
-            <p14:sldId id="471"/>
+            <p14:sldId id="486"/>
             <p14:sldId id="492"/>
-            <p14:sldId id="497"/>
-            <p14:sldId id="486"/>
+            <p14:sldId id="557"/>
             <p14:sldId id="323"/>
             <p14:sldId id="286"/>
             <p14:sldId id="472"/>
             <p14:sldId id="287"/>
             <p14:sldId id="478"/>
+            <p14:sldId id="558"/>
             <p14:sldId id="468"/>
             <p14:sldId id="473"/>
             <p14:sldId id="288"/>
@@ -332,7 +331,6 @@
             <p14:sldId id="483"/>
             <p14:sldId id="489"/>
             <p14:sldId id="487"/>
-            <p14:sldId id="557"/>
           </p14:sldIdLst>
         </p14:section>
         <p14:section name="extra slides" id="{D89B9D84-8AED-794E-B826-66350CFCD900}">
@@ -361,14 +359,14 @@
       <p15:sldGuideLst xmlns:p15="http://schemas.microsoft.com/office/powerpoint/2012/main"/>
     </p:ext>
     <p:ext uri="http://customooxmlschemas.google.com/">
-      <go:slidesCustomData xmlns="" xmlns:mc="http://schemas.openxmlformats.org/markup-compatibility/2006" xmlns:mv="urn:schemas-microsoft-com:mac:vml" xmlns:c="http://schemas.openxmlformats.org/drawingml/2006/chart" xmlns:dgm="http://schemas.openxmlformats.org/drawingml/2006/diagram" xmlns:o="urn:schemas-microsoft-com:office:office" xmlns:v="urn:schemas-microsoft-com:vml" xmlns:pvml="urn:schemas-microsoft-com:office:powerpoint" xmlns:com="http://schemas.openxmlformats.org/drawingml/2006/compatibility" xmlns:p14="http://schemas.microsoft.com/office/powerpoint/2010/main" xmlns:p15="http://schemas.microsoft.com/office/powerpoint/2012/main" xmlns:go="http://customooxmlschemas.google.com/" r:id="rId68" roundtripDataSignature="AMtx7mjFyVUGRZWio+dc9dxzYsimUxNJbg=="/>
+      <go:slidesCustomData xmlns:go="http://customooxmlschemas.google.com/" xmlns:p15="http://schemas.microsoft.com/office/powerpoint/2012/main" xmlns:p14="http://schemas.microsoft.com/office/powerpoint/2010/main" xmlns:com="http://schemas.openxmlformats.org/drawingml/2006/compatibility" xmlns:pvml="urn:schemas-microsoft-com:office:powerpoint" xmlns:v="urn:schemas-microsoft-com:vml" xmlns:o="urn:schemas-microsoft-com:office:office" xmlns:dgm="http://schemas.openxmlformats.org/drawingml/2006/diagram" xmlns:c="http://schemas.openxmlformats.org/drawingml/2006/chart" xmlns:mv="urn:schemas-microsoft-com:mac:vml" xmlns:mc="http://schemas.openxmlformats.org/markup-compatibility/2006" xmlns="" r:id="rId68" roundtripDataSignature="AMtx7mjFyVUGRZWio+dc9dxzYsimUxNJbg=="/>
     </p:ext>
   </p:extLst>
 </p:presentation>
 </file>
 
 <file path=ppt/diagrams/colors1.xml><?xml version="1.0" encoding="utf-8"?>
-<dgm:colorsDef xmlns:dgm="http://schemas.openxmlformats.org/drawingml/2006/diagram" xmlns:a="http://schemas.openxmlformats.org/drawingml/2006/main" uniqueId="urn:microsoft.com/office/officeart/2005/8/colors/colorful1">
+<dgm:colorsDef xmlns:dgm="http://schemas.openxmlformats.org/drawingml/2006/diagram" xmlns:a="http://schemas.openxmlformats.org/drawingml/2006/main" uniqueId="urn:microsoft.com/office/officeart/2005/8/colors/colorful1#3">
   <dgm:title val=""/>
   <dgm:desc val=""/>
   <dgm:catLst>
@@ -1290,7 +1288,7 @@
 <dgm:dataModel xmlns:dgm="http://schemas.openxmlformats.org/drawingml/2006/diagram" xmlns:a="http://schemas.openxmlformats.org/drawingml/2006/main">
   <dgm:ptLst>
     <dgm:pt modelId="{E9FB0F4E-6967-3B44-A32F-E8B1C7AE98D5}" type="doc">
-      <dgm:prSet loTypeId="urn:microsoft.com/office/officeart/2005/8/layout/process5" loCatId="" qsTypeId="urn:microsoft.com/office/officeart/2005/8/quickstyle/simple1" qsCatId="simple" csTypeId="urn:microsoft.com/office/officeart/2005/8/colors/colorful1" csCatId="colorful" phldr="1"/>
+      <dgm:prSet loTypeId="urn:microsoft.com/office/officeart/2005/8/layout/process5" loCatId="" qsTypeId="urn:microsoft.com/office/officeart/2005/8/quickstyle/simple1#3" qsCatId="simple" csTypeId="urn:microsoft.com/office/officeart/2005/8/colors/colorful1#3" csCatId="colorful" phldr="1"/>
       <dgm:spPr/>
       <dgm:t>
         <a:bodyPr/>
@@ -4339,7 +4337,7 @@
 </file>
 
 <file path=ppt/diagrams/quickStyle1.xml><?xml version="1.0" encoding="utf-8"?>
-<dgm:styleDef xmlns:dgm="http://schemas.openxmlformats.org/drawingml/2006/diagram" xmlns:a="http://schemas.openxmlformats.org/drawingml/2006/main" uniqueId="urn:microsoft.com/office/officeart/2005/8/quickstyle/simple1">
+<dgm:styleDef xmlns:dgm="http://schemas.openxmlformats.org/drawingml/2006/diagram" xmlns:a="http://schemas.openxmlformats.org/drawingml/2006/main" uniqueId="urn:microsoft.com/office/officeart/2005/8/quickstyle/simple1#3">
   <dgm:title val=""/>
   <dgm:desc val=""/>
   <dgm:catLst>
@@ -6670,11 +6668,11 @@
 </file>
 
 <file path=ppt/notesSlides/notesSlide2.xml><?xml version="1.0" encoding="utf-8"?>
-<p:notes xmlns:a="http://schemas.openxmlformats.org/drawingml/2006/main" xmlns:r="http://schemas.openxmlformats.org/officeDocument/2006/relationships" xmlns:p="http://schemas.openxmlformats.org/presentationml/2006/main">
+<p:notes xmlns:a="http://schemas.openxmlformats.org/drawingml/2006/main" xmlns:r="http://schemas.openxmlformats.org/officeDocument/2006/relationships" xmlns:p="http://schemas.openxmlformats.org/presentationml/2006/main" showMasterSp="0" showMasterPhAnim="0">
   <p:cSld>
     <p:spTree>
       <p:nvGrpSpPr>
-        <p:cNvPr id="1" name=""/>
+        <p:cNvPr id="1" name="Shape 199"/>
         <p:cNvGrpSpPr/>
         <p:nvPr/>
       </p:nvGrpSpPr>
@@ -6688,51 +6686,71 @@
       </p:grpSpPr>
       <p:sp>
         <p:nvSpPr>
-          <p:cNvPr id="2" name="Slide Image Placeholder 1"/>
+          <p:cNvPr id="200" name="Google Shape;200;g13a827b83f3_1_5:notes"/>
           <p:cNvSpPr>
             <a:spLocks noGrp="1" noRot="1" noChangeAspect="1"/>
           </p:cNvSpPr>
           <p:nvPr>
-            <p:ph type="sldImg"/>
+            <p:ph type="sldImg" idx="2"/>
           </p:nvPr>
         </p:nvSpPr>
-        <p:spPr/>
+        <p:spPr>
+          <a:xfrm>
+            <a:off x="381000" y="685800"/>
+            <a:ext cx="6096000" cy="3429000"/>
+          </a:xfrm>
+          <a:custGeom>
+            <a:avLst/>
+            <a:gdLst/>
+            <a:ahLst/>
+            <a:cxnLst/>
+            <a:rect l="l" t="t" r="r" b="b"/>
+            <a:pathLst>
+              <a:path w="120000" h="120000" extrusionOk="0">
+                <a:moveTo>
+                  <a:pt x="0" y="0"/>
+                </a:moveTo>
+                <a:lnTo>
+                  <a:pt x="120000" y="0"/>
+                </a:lnTo>
+                <a:lnTo>
+                  <a:pt x="120000" y="120000"/>
+                </a:lnTo>
+                <a:lnTo>
+                  <a:pt x="0" y="120000"/>
+                </a:lnTo>
+                <a:close/>
+              </a:path>
+            </a:pathLst>
+          </a:custGeom>
+        </p:spPr>
       </p:sp>
       <p:sp>
         <p:nvSpPr>
-          <p:cNvPr id="3" name="Notes Placeholder 2"/>
-          <p:cNvSpPr>
+          <p:cNvPr id="201" name="Google Shape;201;g13a827b83f3_1_5:notes"/>
+          <p:cNvSpPr txBox="1">
             <a:spLocks noGrp="1"/>
           </p:cNvSpPr>
           <p:nvPr>
             <p:ph type="body" idx="1"/>
           </p:nvPr>
         </p:nvSpPr>
-        <p:spPr/>
+        <p:spPr>
+          <a:xfrm>
+            <a:off x="685800" y="4343400"/>
+            <a:ext cx="5486400" cy="4114800"/>
+          </a:xfrm>
+          <a:prstGeom prst="rect">
+            <a:avLst/>
+          </a:prstGeom>
+        </p:spPr>
         <p:txBody>
-          <a:bodyPr/>
+          <a:bodyPr spcFirstLastPara="1" wrap="square" lIns="91425" tIns="91425" rIns="91425" bIns="91425" anchor="t" anchorCtr="0">
+            <a:noAutofit/>
+          </a:bodyPr>
           <a:lstStyle/>
           <a:p>
-            <a:endParaRPr lang="en-US" dirty="0"/>
-          </a:p>
-        </p:txBody>
-      </p:sp>
-      <p:sp>
-        <p:nvSpPr>
-          <p:cNvPr id="4" name="Slide Number Placeholder 3"/>
-          <p:cNvSpPr>
-            <a:spLocks noGrp="1"/>
-          </p:cNvSpPr>
-          <p:nvPr>
-            <p:ph type="sldNum" idx="12"/>
-          </p:nvPr>
-        </p:nvSpPr>
-        <p:spPr/>
-        <p:txBody>
-          <a:bodyPr/>
-          <a:lstStyle/>
-          <a:p>
-            <a:pPr marL="0" marR="0" lvl="0" indent="0" algn="r" rtl="0">
+            <a:pPr marL="0" lvl="0" indent="0" algn="l" rtl="0">
               <a:spcBef>
                 <a:spcPts val="0"/>
               </a:spcBef>
@@ -6741,34 +6759,14 @@
               </a:spcAft>
               <a:buNone/>
             </a:pPr>
-            <a:fld id="{00000000-1234-1234-1234-123412341234}" type="slidenum">
-              <a:rPr lang="en-US" sz="1200" b="0" i="0" u="none" strike="noStrike" cap="none" smtClean="0">
-                <a:solidFill>
-                  <a:schemeClr val="dk1"/>
-                </a:solidFill>
-                <a:latin typeface="Calibri"/>
-                <a:ea typeface="Calibri"/>
-                <a:cs typeface="Calibri"/>
-                <a:sym typeface="Calibri"/>
-              </a:rPr>
-              <a:t>4</a:t>
-            </a:fld>
-            <a:endParaRPr lang="en-US" sz="1200" b="0" i="0" u="none" strike="noStrike" cap="none">
-              <a:solidFill>
-                <a:schemeClr val="dk1"/>
-              </a:solidFill>
-              <a:latin typeface="Calibri"/>
-              <a:ea typeface="Calibri"/>
-              <a:cs typeface="Calibri"/>
-              <a:sym typeface="Calibri"/>
-            </a:endParaRPr>
+            <a:endParaRPr/>
           </a:p>
         </p:txBody>
       </p:sp>
     </p:spTree>
     <p:extLst>
       <p:ext uri="{BB962C8B-B14F-4D97-AF65-F5344CB8AC3E}">
-        <p14:creationId xmlns:p14="http://schemas.microsoft.com/office/powerpoint/2010/main" val="1142151633"/>
+        <p14:creationId xmlns:p14="http://schemas.microsoft.com/office/powerpoint/2010/main" val="342831109"/>
       </p:ext>
     </p:extLst>
   </p:cSld>
@@ -6877,7 +6875,7 @@
     </p:spTree>
     <p:extLst>
       <p:ext uri="{BB962C8B-B14F-4D97-AF65-F5344CB8AC3E}">
-        <p14:creationId xmlns:p14="http://schemas.microsoft.com/office/powerpoint/2010/main" val="342831109"/>
+        <p14:creationId xmlns:p14="http://schemas.microsoft.com/office/powerpoint/2010/main" val="3167519624"/>
       </p:ext>
     </p:extLst>
   </p:cSld>
@@ -6888,115 +6886,6 @@
 </file>
 
 <file path=ppt/notesSlides/notesSlide4.xml><?xml version="1.0" encoding="utf-8"?>
-<p:notes xmlns:a="http://schemas.openxmlformats.org/drawingml/2006/main" xmlns:r="http://schemas.openxmlformats.org/officeDocument/2006/relationships" xmlns:p="http://schemas.openxmlformats.org/presentationml/2006/main" showMasterSp="0" showMasterPhAnim="0">
-  <p:cSld>
-    <p:spTree>
-      <p:nvGrpSpPr>
-        <p:cNvPr id="1" name="Shape 199"/>
-        <p:cNvGrpSpPr/>
-        <p:nvPr/>
-      </p:nvGrpSpPr>
-      <p:grpSpPr>
-        <a:xfrm>
-          <a:off x="0" y="0"/>
-          <a:ext cx="0" cy="0"/>
-          <a:chOff x="0" y="0"/>
-          <a:chExt cx="0" cy="0"/>
-        </a:xfrm>
-      </p:grpSpPr>
-      <p:sp>
-        <p:nvSpPr>
-          <p:cNvPr id="200" name="Google Shape;200;g13a827b83f3_1_5:notes"/>
-          <p:cNvSpPr>
-            <a:spLocks noGrp="1" noRot="1" noChangeAspect="1"/>
-          </p:cNvSpPr>
-          <p:nvPr>
-            <p:ph type="sldImg" idx="2"/>
-          </p:nvPr>
-        </p:nvSpPr>
-        <p:spPr>
-          <a:xfrm>
-            <a:off x="381000" y="685800"/>
-            <a:ext cx="6096000" cy="3429000"/>
-          </a:xfrm>
-          <a:custGeom>
-            <a:avLst/>
-            <a:gdLst/>
-            <a:ahLst/>
-            <a:cxnLst/>
-            <a:rect l="l" t="t" r="r" b="b"/>
-            <a:pathLst>
-              <a:path w="120000" h="120000" extrusionOk="0">
-                <a:moveTo>
-                  <a:pt x="0" y="0"/>
-                </a:moveTo>
-                <a:lnTo>
-                  <a:pt x="120000" y="0"/>
-                </a:lnTo>
-                <a:lnTo>
-                  <a:pt x="120000" y="120000"/>
-                </a:lnTo>
-                <a:lnTo>
-                  <a:pt x="0" y="120000"/>
-                </a:lnTo>
-                <a:close/>
-              </a:path>
-            </a:pathLst>
-          </a:custGeom>
-        </p:spPr>
-      </p:sp>
-      <p:sp>
-        <p:nvSpPr>
-          <p:cNvPr id="201" name="Google Shape;201;g13a827b83f3_1_5:notes"/>
-          <p:cNvSpPr txBox="1">
-            <a:spLocks noGrp="1"/>
-          </p:cNvSpPr>
-          <p:nvPr>
-            <p:ph type="body" idx="1"/>
-          </p:nvPr>
-        </p:nvSpPr>
-        <p:spPr>
-          <a:xfrm>
-            <a:off x="685800" y="4343400"/>
-            <a:ext cx="5486400" cy="4114800"/>
-          </a:xfrm>
-          <a:prstGeom prst="rect">
-            <a:avLst/>
-          </a:prstGeom>
-        </p:spPr>
-        <p:txBody>
-          <a:bodyPr spcFirstLastPara="1" wrap="square" lIns="91425" tIns="91425" rIns="91425" bIns="91425" anchor="t" anchorCtr="0">
-            <a:noAutofit/>
-          </a:bodyPr>
-          <a:lstStyle/>
-          <a:p>
-            <a:pPr marL="0" lvl="0" indent="0" algn="l" rtl="0">
-              <a:spcBef>
-                <a:spcPts val="0"/>
-              </a:spcBef>
-              <a:spcAft>
-                <a:spcPts val="0"/>
-              </a:spcAft>
-              <a:buNone/>
-            </a:pPr>
-            <a:endParaRPr/>
-          </a:p>
-        </p:txBody>
-      </p:sp>
-    </p:spTree>
-    <p:extLst>
-      <p:ext uri="{BB962C8B-B14F-4D97-AF65-F5344CB8AC3E}">
-        <p14:creationId xmlns:p14="http://schemas.microsoft.com/office/powerpoint/2010/main" val="3167519624"/>
-      </p:ext>
-    </p:extLst>
-  </p:cSld>
-  <p:clrMapOvr>
-    <a:masterClrMapping/>
-  </p:clrMapOvr>
-</p:notes>
-</file>
-
-<file path=ppt/notesSlides/notesSlide5.xml><?xml version="1.0" encoding="utf-8"?>
 <p:notes xmlns:a="http://schemas.openxmlformats.org/drawingml/2006/main" xmlns:r="http://schemas.openxmlformats.org/officeDocument/2006/relationships" xmlns:p="http://schemas.openxmlformats.org/presentationml/2006/main" showMasterSp="0" showMasterPhAnim="0">
   <p:cSld>
     <p:spTree>
@@ -7678,7 +7567,7 @@
           <a:p>
             <a:fld id="{7C0312F8-2DE2-6B40-83C5-731724CAE2B0}" type="datetimeFigureOut">
               <a:rPr lang="en-US" smtClean="0"/>
-              <a:t>9/16/25</a:t>
+              <a:t>9/16/26</a:t>
             </a:fld>
             <a:endParaRPr lang="en-US"/>
           </a:p>
@@ -7963,7 +7852,7 @@
           <a:p>
             <a:fld id="{7C0312F8-2DE2-6B40-83C5-731724CAE2B0}" type="datetimeFigureOut">
               <a:rPr lang="en-US" smtClean="0"/>
-              <a:t>9/16/25</a:t>
+              <a:t>9/16/26</a:t>
             </a:fld>
             <a:endParaRPr lang="en-US"/>
           </a:p>
@@ -8382,7 +8271,7 @@
           <a:p>
             <a:fld id="{7C0312F8-2DE2-6B40-83C5-731724CAE2B0}" type="datetimeFigureOut">
               <a:rPr lang="en-US" smtClean="0"/>
-              <a:t>9/16/25</a:t>
+              <a:t>9/16/26</a:t>
             </a:fld>
             <a:endParaRPr lang="en-US"/>
           </a:p>
@@ -8477,7 +8366,7 @@
           <a:p>
             <a:fld id="{7C0312F8-2DE2-6B40-83C5-731724CAE2B0}" type="datetimeFigureOut">
               <a:rPr lang="en-US" smtClean="0"/>
-              <a:t>9/16/25</a:t>
+              <a:t>9/16/26</a:t>
             </a:fld>
             <a:endParaRPr lang="en-US"/>
           </a:p>
@@ -9735,110 +9624,6 @@
 </file>
 
 <file path=ppt/slideLayouts/slideLayout5.xml><?xml version="1.0" encoding="utf-8"?>
-<p:sldLayout xmlns:a="http://schemas.openxmlformats.org/drawingml/2006/main" xmlns:r="http://schemas.openxmlformats.org/officeDocument/2006/relationships" xmlns:p="http://schemas.openxmlformats.org/presentationml/2006/main" matchingName="Blank" type="blank">
-  <p:cSld name="BLANK">
-    <p:spTree>
-      <p:nvGrpSpPr>
-        <p:cNvPr id="1" name="Shape 55"/>
-        <p:cNvGrpSpPr/>
-        <p:nvPr/>
-      </p:nvGrpSpPr>
-      <p:grpSpPr>
-        <a:xfrm>
-          <a:off x="0" y="0"/>
-          <a:ext cx="0" cy="0"/>
-          <a:chOff x="0" y="0"/>
-          <a:chExt cx="0" cy="0"/>
-        </a:xfrm>
-      </p:grpSpPr>
-      <p:sp>
-        <p:nvSpPr>
-          <p:cNvPr id="56" name="Google Shape;56;g6dad9273e7_0_46"/>
-          <p:cNvSpPr txBox="1">
-            <a:spLocks noGrp="1"/>
-          </p:cNvSpPr>
-          <p:nvPr>
-            <p:ph type="sldNum" idx="12"/>
-          </p:nvPr>
-        </p:nvSpPr>
-        <p:spPr>
-          <a:xfrm>
-            <a:off x="11296610" y="6217622"/>
-            <a:ext cx="731700" cy="524700"/>
-          </a:xfrm>
-          <a:prstGeom prst="rect">
-            <a:avLst/>
-          </a:prstGeom>
-        </p:spPr>
-        <p:txBody>
-          <a:bodyPr spcFirstLastPara="1" wrap="square" lIns="121900" tIns="121900" rIns="121900" bIns="121900" anchor="ctr" anchorCtr="0">
-            <a:noAutofit/>
-          </a:bodyPr>
-          <a:lstStyle>
-            <a:lvl1pPr lvl="0">
-              <a:buNone/>
-              <a:defRPr/>
-            </a:lvl1pPr>
-            <a:lvl2pPr lvl="1">
-              <a:buNone/>
-              <a:defRPr/>
-            </a:lvl2pPr>
-            <a:lvl3pPr lvl="2">
-              <a:buNone/>
-              <a:defRPr/>
-            </a:lvl3pPr>
-            <a:lvl4pPr lvl="3">
-              <a:buNone/>
-              <a:defRPr/>
-            </a:lvl4pPr>
-            <a:lvl5pPr lvl="4">
-              <a:buNone/>
-              <a:defRPr/>
-            </a:lvl5pPr>
-            <a:lvl6pPr lvl="5">
-              <a:buNone/>
-              <a:defRPr/>
-            </a:lvl6pPr>
-            <a:lvl7pPr lvl="6">
-              <a:buNone/>
-              <a:defRPr/>
-            </a:lvl7pPr>
-            <a:lvl8pPr lvl="7">
-              <a:buNone/>
-              <a:defRPr/>
-            </a:lvl8pPr>
-            <a:lvl9pPr lvl="8">
-              <a:buNone/>
-              <a:defRPr/>
-            </a:lvl9pPr>
-          </a:lstStyle>
-          <a:p>
-            <a:pPr marL="0" lvl="0" indent="0" algn="r" rtl="0">
-              <a:spcBef>
-                <a:spcPts val="0"/>
-              </a:spcBef>
-              <a:spcAft>
-                <a:spcPts val="0"/>
-              </a:spcAft>
-              <a:buNone/>
-            </a:pPr>
-            <a:fld id="{00000000-1234-1234-1234-123412341234}" type="slidenum">
-              <a:rPr lang="en-US"/>
-              <a:t>‹#›</a:t>
-            </a:fld>
-            <a:endParaRPr/>
-          </a:p>
-        </p:txBody>
-      </p:sp>
-    </p:spTree>
-  </p:cSld>
-  <p:clrMapOvr>
-    <a:masterClrMapping/>
-  </p:clrMapOvr>
-</p:sldLayout>
-</file>
-
-<file path=ppt/slideLayouts/slideLayout6.xml><?xml version="1.0" encoding="utf-8"?>
 <p:sldLayout xmlns:a="http://schemas.openxmlformats.org/drawingml/2006/main" xmlns:r="http://schemas.openxmlformats.org/officeDocument/2006/relationships" xmlns:p="http://schemas.openxmlformats.org/presentationml/2006/main" matchingName="1_Title and Content">
   <p:cSld name="1_Title and Content">
     <p:spTree>
@@ -10117,7 +9902,7 @@
 </p:sldLayout>
 </file>
 
-<file path=ppt/slideLayouts/slideLayout7.xml><?xml version="1.0" encoding="utf-8"?>
+<file path=ppt/slideLayouts/slideLayout6.xml><?xml version="1.0" encoding="utf-8"?>
 <p:sldLayout xmlns:a="http://schemas.openxmlformats.org/drawingml/2006/main" xmlns:r="http://schemas.openxmlformats.org/officeDocument/2006/relationships" xmlns:p="http://schemas.openxmlformats.org/presentationml/2006/main" type="obj">
   <p:cSld name="Title and Content">
     <p:spTree>
@@ -10282,6 +10067,74 @@
     <p:extLst>
       <p:ext uri="{BB962C8B-B14F-4D97-AF65-F5344CB8AC3E}">
         <p14:creationId xmlns:p14="http://schemas.microsoft.com/office/powerpoint/2010/main" val="3493026761"/>
+      </p:ext>
+    </p:extLst>
+  </p:cSld>
+  <p:clrMapOvr>
+    <a:masterClrMapping/>
+  </p:clrMapOvr>
+</p:sldLayout>
+</file>
+
+<file path=ppt/slideLayouts/slideLayout7.xml><?xml version="1.0" encoding="utf-8"?>
+<p:sldLayout xmlns:a="http://schemas.openxmlformats.org/drawingml/2006/main" xmlns:r="http://schemas.openxmlformats.org/officeDocument/2006/relationships" xmlns:p="http://schemas.openxmlformats.org/presentationml/2006/main" type="blank" preserve="1">
+  <p:cSld name="Blank">
+    <p:spTree>
+      <p:nvGrpSpPr>
+        <p:cNvPr id="1" name=""/>
+        <p:cNvGrpSpPr/>
+        <p:nvPr/>
+      </p:nvGrpSpPr>
+      <p:grpSpPr>
+        <a:xfrm>
+          <a:off x="0" y="0"/>
+          <a:ext cx="0" cy="0"/>
+          <a:chOff x="0" y="0"/>
+          <a:chExt cx="0" cy="0"/>
+        </a:xfrm>
+      </p:grpSpPr>
+      <p:sp>
+        <p:nvSpPr>
+          <p:cNvPr id="2" name="Slide Number Placeholder 1">
+            <a:extLst>
+              <a:ext uri="{FF2B5EF4-FFF2-40B4-BE49-F238E27FC236}">
+                <a16:creationId xmlns:a16="http://schemas.microsoft.com/office/drawing/2014/main" id="{9BE35051-1952-58C9-5212-62210AF01228}"/>
+              </a:ext>
+            </a:extLst>
+          </p:cNvPr>
+          <p:cNvSpPr>
+            <a:spLocks noGrp="1"/>
+          </p:cNvSpPr>
+          <p:nvPr>
+            <p:ph type="sldNum" idx="10"/>
+          </p:nvPr>
+        </p:nvSpPr>
+        <p:spPr/>
+        <p:txBody>
+          <a:bodyPr/>
+          <a:lstStyle/>
+          <a:p>
+            <a:pPr marL="0" lvl="0" indent="0" algn="r" rtl="0">
+              <a:spcBef>
+                <a:spcPts val="0"/>
+              </a:spcBef>
+              <a:spcAft>
+                <a:spcPts val="0"/>
+              </a:spcAft>
+              <a:buNone/>
+            </a:pPr>
+            <a:fld id="{00000000-1234-1234-1234-123412341234}" type="slidenum">
+              <a:rPr lang="en-US" smtClean="0"/>
+              <a:t>‹#›</a:t>
+            </a:fld>
+            <a:endParaRPr lang="en-US"/>
+          </a:p>
+        </p:txBody>
+      </p:sp>
+    </p:spTree>
+    <p:extLst>
+      <p:ext uri="{BB962C8B-B14F-4D97-AF65-F5344CB8AC3E}">
+        <p14:creationId xmlns:p14="http://schemas.microsoft.com/office/powerpoint/2010/main" val="450197735"/>
       </p:ext>
     </p:extLst>
   </p:cSld>
@@ -11309,9 +11162,9 @@
     <p:sldLayoutId id="2147483650" r:id="rId2"/>
     <p:sldLayoutId id="2147483651" r:id="rId3"/>
     <p:sldLayoutId id="2147483652" r:id="rId4"/>
-    <p:sldLayoutId id="2147483659" r:id="rId5"/>
-    <p:sldLayoutId id="2147483667" r:id="rId6"/>
-    <p:sldLayoutId id="2147483668" r:id="rId7"/>
+    <p:sldLayoutId id="2147483667" r:id="rId5"/>
+    <p:sldLayoutId id="2147483668" r:id="rId6"/>
+    <p:sldLayoutId id="2147483669" r:id="rId7"/>
   </p:sldLayoutIdLst>
   <p:hf sldNum="0" hdr="0" ftr="0" dt="0"/>
   <p:txStyles>
@@ -12156,7 +12009,7 @@
           <a:p>
             <a:fld id="{7C0312F8-2DE2-6B40-83C5-731724CAE2B0}" type="datetimeFigureOut">
               <a:rPr lang="en-US" smtClean="0"/>
-              <a:t>9/16/25</a:t>
+              <a:t>9/16/26</a:t>
             </a:fld>
             <a:endParaRPr lang="en-US"/>
           </a:p>
@@ -12708,8 +12561,16 @@
 </file>
 
 <file path=ppt/slides/slide10.xml><?xml version="1.0" encoding="utf-8"?>
-<p:sld xmlns:a="http://schemas.openxmlformats.org/drawingml/2006/main" xmlns:r="http://schemas.openxmlformats.org/officeDocument/2006/relationships" xmlns:p="http://schemas.openxmlformats.org/presentationml/2006/main">
+<p:sld xmlns:a="http://schemas.openxmlformats.org/drawingml/2006/main" xmlns:r="http://schemas.openxmlformats.org/officeDocument/2006/relationships" xmlns:p="http://schemas.openxmlformats.org/presentationml/2006/main" showMasterSp="0">
   <p:cSld>
+    <p:bg>
+      <p:bgPr>
+        <a:solidFill>
+          <a:srgbClr val="FFFFFF"/>
+        </a:solidFill>
+        <a:effectLst/>
+      </p:bgPr>
+    </p:bg>
     <p:spTree>
       <p:nvGrpSpPr>
         <p:cNvPr id="1" name=""/>
@@ -12724,81 +12585,16 @@
           <a:chExt cx="0" cy="0"/>
         </a:xfrm>
       </p:grpSpPr>
-      <p:sp>
-        <p:nvSpPr>
-          <p:cNvPr id="4" name="Title 3">
-            <a:extLst>
-              <a:ext uri="{FF2B5EF4-FFF2-40B4-BE49-F238E27FC236}">
-                <a16:creationId xmlns:a16="http://schemas.microsoft.com/office/drawing/2014/main" id="{30C2C959-72F2-EF4D-80DA-F48A29D0F3C4}"/>
-              </a:ext>
-            </a:extLst>
-          </p:cNvPr>
-          <p:cNvSpPr>
-            <a:spLocks noGrp="1"/>
-          </p:cNvSpPr>
-          <p:nvPr>
-            <p:ph type="title"/>
-          </p:nvPr>
-        </p:nvSpPr>
-        <p:spPr/>
-        <p:txBody>
-          <a:bodyPr/>
-          <a:lstStyle/>
-          <a:p>
-            <a:r>
-              <a:rPr lang="en-US" dirty="0"/>
-              <a:t>What do we need our selected model to do?</a:t>
-            </a:r>
-          </a:p>
-        </p:txBody>
-      </p:sp>
-      <p:sp>
-        <p:nvSpPr>
-          <p:cNvPr id="3" name="Text Placeholder 2">
-            <a:extLst>
-              <a:ext uri="{FF2B5EF4-FFF2-40B4-BE49-F238E27FC236}">
-                <a16:creationId xmlns:a16="http://schemas.microsoft.com/office/drawing/2014/main" id="{DA13BAFF-48B6-9046-94F3-CBF50B2F21D8}"/>
-              </a:ext>
-            </a:extLst>
-          </p:cNvPr>
-          <p:cNvSpPr>
-            <a:spLocks noGrp="1"/>
-          </p:cNvSpPr>
-          <p:nvPr>
-            <p:ph type="body" idx="1"/>
-          </p:nvPr>
-        </p:nvSpPr>
-        <p:spPr/>
-        <p:txBody>
-          <a:bodyPr/>
-          <a:lstStyle/>
-          <a:p>
-            <a:endParaRPr lang="en-US"/>
-          </a:p>
-        </p:txBody>
-      </p:sp>
     </p:spTree>
     <p:extLst>
       <p:ext uri="{BB962C8B-B14F-4D97-AF65-F5344CB8AC3E}">
-        <p14:creationId xmlns:p14="http://schemas.microsoft.com/office/powerpoint/2010/main" val="106807354"/>
+        <p14:creationId xmlns:p14="http://schemas.microsoft.com/office/powerpoint/2010/main" val="1776024530"/>
       </p:ext>
     </p:extLst>
   </p:cSld>
   <p:clrMapOvr>
     <a:masterClrMapping/>
   </p:clrMapOvr>
-  <mc:AlternateContent xmlns:mc="http://schemas.openxmlformats.org/markup-compatibility/2006" xmlns:p14="http://schemas.microsoft.com/office/powerpoint/2010/main">
-    <mc:Choice Requires="p14">
-      <p:transition spd="med" p14:dur="700">
-        <p:fade/>
-      </p:transition>
-    </mc:Choice>
-    <mc:Fallback xmlns="">
-      <p:transition spd="med">
-        <p:fade/>
-      </p:transition>
-    </mc:Fallback>
-  </mc:AlternateContent>
 </p:sld>
 </file>
 
@@ -13102,7 +12898,13 @@
           <a:bodyPr/>
           <a:lstStyle/>
           <a:p>
-            <a:endParaRPr lang="en-US"/>
+            <a:r>
+              <a:rPr lang="en-US" dirty="0"/>
+              <a:t>Do it for each project</a:t>
+            </a:r>
+          </a:p>
+          <a:p>
+            <a:endParaRPr lang="en-US" dirty="0"/>
           </a:p>
         </p:txBody>
       </p:sp>
@@ -13153,7 +12955,7 @@
           <a:p>
             <a:r>
               <a:rPr lang="en-US" dirty="0"/>
-              <a:t>What do need to know to perform model selection</a:t>
+              <a:t>What do we need to know to perform model selection</a:t>
             </a:r>
           </a:p>
         </p:txBody>
@@ -14268,10 +14070,10 @@
       </p:grpSpPr>
       <p:sp>
         <p:nvSpPr>
-          <p:cNvPr id="3" name="Title 2">
+          <p:cNvPr id="2" name="Title 1">
             <a:extLst>
               <a:ext uri="{FF2B5EF4-FFF2-40B4-BE49-F238E27FC236}">
-                <a16:creationId xmlns:a16="http://schemas.microsoft.com/office/drawing/2014/main" id="{9323871C-7CA8-1448-8FFC-1AE6E1838941}"/>
+                <a16:creationId xmlns:a16="http://schemas.microsoft.com/office/drawing/2014/main" id="{A073B702-ED77-884E-88F7-92D73313F38D}"/>
               </a:ext>
             </a:extLst>
           </p:cNvPr>
@@ -14289,17 +14091,17 @@
           <a:p>
             <a:r>
               <a:rPr lang="en-US" dirty="0"/>
-              <a:t>Reminders</a:t>
+              <a:t>Plan for the week</a:t>
             </a:r>
           </a:p>
         </p:txBody>
       </p:sp>
       <p:sp>
         <p:nvSpPr>
-          <p:cNvPr id="5" name="Text Placeholder 4">
+          <p:cNvPr id="3" name="Text Placeholder 2">
             <a:extLst>
               <a:ext uri="{FF2B5EF4-FFF2-40B4-BE49-F238E27FC236}">
-                <a16:creationId xmlns:a16="http://schemas.microsoft.com/office/drawing/2014/main" id="{F4E0A5F0-1D89-954D-91FB-596CD9E690F2}"/>
+                <a16:creationId xmlns:a16="http://schemas.microsoft.com/office/drawing/2014/main" id="{7861BAD4-F7FB-1D48-9D37-2273592A75CE}"/>
               </a:ext>
             </a:extLst>
           </p:cNvPr>
@@ -14315,53 +14117,48 @@
           <a:bodyPr/>
           <a:lstStyle/>
           <a:p>
-            <a:pPr marL="76200" indent="0">
-              <a:buNone/>
-            </a:pPr>
-            <a:r>
-              <a:rPr lang="en-US" b="1" dirty="0"/>
-              <a:t>Coming up next week:</a:t>
-            </a:r>
-          </a:p>
-          <a:p>
-            <a:pPr marL="76200" indent="0">
-              <a:buNone/>
-            </a:pPr>
-            <a:endParaRPr lang="en-US" b="1" dirty="0"/>
-          </a:p>
-          <a:p>
             <a:r>
               <a:rPr lang="en-US" dirty="0"/>
-              <a:t>Monday: Project Update 2</a:t>
+              <a:t>What you should be discussing this week within your team</a:t>
             </a:r>
           </a:p>
           <a:p>
             <a:pPr lvl="1"/>
             <a:r>
-              <a:rPr lang="en-US" sz="2000" dirty="0"/>
-              <a:t>Also see feedback in update 1 slides (in the next couple of days)</a:t>
-            </a:r>
-            <a:br>
               <a:rPr lang="en-US" dirty="0"/>
-            </a:br>
+              <a:t>Finalizing your goals and data</a:t>
+            </a:r>
+          </a:p>
+          <a:p>
+            <a:pPr lvl="1"/>
+            <a:r>
+              <a:rPr lang="en-US" dirty="0"/>
+              <a:t>analytical formulation and baselines to compare against</a:t>
+            </a:r>
+          </a:p>
+          <a:p>
+            <a:pPr lvl="1"/>
             <a:endParaRPr lang="en-US" dirty="0"/>
           </a:p>
           <a:p>
             <a:r>
               <a:rPr lang="en-US" dirty="0"/>
-              <a:t>Tuesday: Weekly Feedback Form</a:t>
-            </a:r>
-            <a:br>
+              <a:t>What you should be building this week</a:t>
+            </a:r>
+          </a:p>
+          <a:p>
+            <a:pPr lvl="1"/>
+            <a:r>
               <a:rPr lang="en-US" dirty="0"/>
-            </a:br>
-            <a:endParaRPr lang="en-US" dirty="0"/>
+              <a:t>V0 of your ML pipeline shell</a:t>
+            </a:r>
           </a:p>
         </p:txBody>
       </p:sp>
     </p:spTree>
     <p:extLst>
       <p:ext uri="{BB962C8B-B14F-4D97-AF65-F5344CB8AC3E}">
-        <p14:creationId xmlns:p14="http://schemas.microsoft.com/office/powerpoint/2010/main" val="186046226"/>
+        <p14:creationId xmlns:p14="http://schemas.microsoft.com/office/powerpoint/2010/main" val="2336692870"/>
       </p:ext>
     </p:extLst>
   </p:cSld>
@@ -15831,10 +15628,7 @@
                 <a:pPr/>
                 <a14:m>
                   <m:oMathPara xmlns:m="http://schemas.openxmlformats.org/officeDocument/2006/math">
-                    <m:oMathParaPr>
-                      <m:jc m:val="centerGroup"/>
-                    </m:oMathParaPr>
-                    <m:oMath xmlns:m="http://schemas.openxmlformats.org/officeDocument/2006/math">
+                    <m:oMath>
                       <m:r>
                         <a:rPr lang="en-US" sz="3600" b="0" i="1" smtClean="0">
                           <a:latin typeface="Cambria Math" panose="02040503050406030204" pitchFamily="18" charset="0"/>
@@ -16877,10 +16671,7 @@
                 <a:pPr/>
                 <a14:m>
                   <m:oMathPara xmlns:m="http://schemas.openxmlformats.org/officeDocument/2006/math">
-                    <m:oMathParaPr>
-                      <m:jc m:val="centerGroup"/>
-                    </m:oMathParaPr>
-                    <m:oMath xmlns:m="http://schemas.openxmlformats.org/officeDocument/2006/math">
+                    <m:oMath>
                       <m:r>
                         <a:rPr lang="en-US" sz="3600" b="0" i="1" smtClean="0">
                           <a:latin typeface="Cambria Math" panose="02040503050406030204" pitchFamily="18" charset="0"/>
@@ -18124,10 +17915,7 @@
                 <a:pPr/>
                 <a14:m>
                   <m:oMathPara xmlns:m="http://schemas.openxmlformats.org/officeDocument/2006/math">
-                    <m:oMathParaPr>
-                      <m:jc m:val="centerGroup"/>
-                    </m:oMathParaPr>
-                    <m:oMath xmlns:m="http://schemas.openxmlformats.org/officeDocument/2006/math">
+                    <m:oMath>
                       <m:r>
                         <a:rPr lang="en-US" sz="3600" b="0" i="1" smtClean="0">
                           <a:latin typeface="Cambria Math" panose="02040503050406030204" pitchFamily="18" charset="0"/>
@@ -19496,10 +19284,7 @@
                 <a:pPr/>
                 <a14:m>
                   <m:oMathPara xmlns:m="http://schemas.openxmlformats.org/officeDocument/2006/math">
-                    <m:oMathParaPr>
-                      <m:jc m:val="centerGroup"/>
-                    </m:oMathParaPr>
-                    <m:oMath xmlns:m="http://schemas.openxmlformats.org/officeDocument/2006/math">
+                    <m:oMath>
                       <m:r>
                         <a:rPr lang="en-US" sz="3600" b="0" i="1" smtClean="0">
                           <a:latin typeface="Cambria Math" panose="02040503050406030204" pitchFamily="18" charset="0"/>
@@ -20741,10 +20526,7 @@
                 <a:pPr/>
                 <a14:m>
                   <m:oMathPara xmlns:m="http://schemas.openxmlformats.org/officeDocument/2006/math">
-                    <m:oMathParaPr>
-                      <m:jc m:val="centerGroup"/>
-                    </m:oMathParaPr>
-                    <m:oMath xmlns:m="http://schemas.openxmlformats.org/officeDocument/2006/math">
+                    <m:oMath>
                       <m:r>
                         <a:rPr lang="en-US" sz="3600" b="0" i="1" smtClean="0">
                           <a:latin typeface="Cambria Math" panose="02040503050406030204" pitchFamily="18" charset="0"/>
@@ -21992,10 +21774,7 @@
                 <a:pPr/>
                 <a14:m>
                   <m:oMathPara xmlns:m="http://schemas.openxmlformats.org/officeDocument/2006/math">
-                    <m:oMathParaPr>
-                      <m:jc m:val="centerGroup"/>
-                    </m:oMathParaPr>
-                    <m:oMath xmlns:m="http://schemas.openxmlformats.org/officeDocument/2006/math">
+                    <m:oMath>
                       <m:r>
                         <a:rPr lang="en-US" sz="3600" b="0" i="1" smtClean="0">
                           <a:latin typeface="Cambria Math" panose="02040503050406030204" pitchFamily="18" charset="0"/>
@@ -24287,531 +24066,6 @@
 </file>
 
 <file path=ppt/slides/slide34.xml><?xml version="1.0" encoding="utf-8"?>
-<p:sld xmlns:a="http://schemas.openxmlformats.org/drawingml/2006/main" xmlns:r="http://schemas.openxmlformats.org/officeDocument/2006/relationships" xmlns:p="http://schemas.openxmlformats.org/presentationml/2006/main" showMasterSp="0">
-  <p:cSld>
-    <p:bg>
-      <p:bgPr>
-        <a:solidFill>
-          <a:srgbClr val="FFFFFF"/>
-        </a:solidFill>
-        <a:effectLst/>
-      </p:bgPr>
-    </p:bg>
-    <p:spTree>
-      <p:nvGrpSpPr>
-        <p:cNvPr id="1" name=""/>
-        <p:cNvGrpSpPr/>
-        <p:nvPr/>
-      </p:nvGrpSpPr>
-      <p:grpSpPr>
-        <a:xfrm>
-          <a:off x="0" y="0"/>
-          <a:ext cx="0" cy="0"/>
-          <a:chOff x="0" y="0"/>
-          <a:chExt cx="0" cy="0"/>
-        </a:xfrm>
-      </p:grpSpPr>
-      <p:sp>
-        <p:nvSpPr>
-          <p:cNvPr id="2" name="Rectangle 1">
-            <a:extLst>
-              <a:ext uri="{FF2B5EF4-FFF2-40B4-BE49-F238E27FC236}">
-                <a16:creationId xmlns:a16="http://schemas.microsoft.com/office/drawing/2014/main" id="{D144B930-4FEE-20EF-3726-D9053835C9BD}"/>
-              </a:ext>
-            </a:extLst>
-          </p:cNvPr>
-          <p:cNvSpPr/>
-          <p:nvPr>
-            <p:custDataLst>
-              <p:tags r:id="rId2"/>
-            </p:custDataLst>
-          </p:nvPr>
-        </p:nvSpPr>
-        <p:spPr>
-          <a:xfrm>
-            <a:off x="444693" y="1742703"/>
-            <a:ext cx="2371696" cy="2371696"/>
-          </a:xfrm>
-          <a:prstGeom prst="rect">
-            <a:avLst/>
-          </a:prstGeom>
-          <a:blipFill>
-            <a:blip r:embed="rId5">
-              <a:extLst>
-                <a:ext uri="{96DAC541-7B7A-43D3-8B79-37D633B846F1}">
-                  <asvg:svgBlip xmlns:asvg="http://schemas.microsoft.com/office/drawing/2016/SVG/main" r:embed="rId6"/>
-                </a:ext>
-              </a:extLst>
-            </a:blip>
-            <a:stretch>
-              <a:fillRect/>
-            </a:stretch>
-          </a:blipFill>
-          <a:ln>
-            <a:solidFill>
-              <a:srgbClr val="FFFFFF"/>
-            </a:solidFill>
-          </a:ln>
-        </p:spPr>
-        <p:style>
-          <a:lnRef idx="2">
-            <a:schemeClr val="accent1">
-              <a:shade val="15000"/>
-            </a:schemeClr>
-          </a:lnRef>
-          <a:fillRef idx="1">
-            <a:schemeClr val="accent1"/>
-          </a:fillRef>
-          <a:effectRef idx="0">
-            <a:schemeClr val="accent1"/>
-          </a:effectRef>
-          <a:fontRef idx="minor">
-            <a:schemeClr val="lt1"/>
-          </a:fontRef>
-        </p:style>
-        <p:txBody>
-          <a:bodyPr rtlCol="0" anchor="ctr"/>
-          <a:lstStyle/>
-          <a:p>
-            <a:pPr algn="ctr"/>
-            <a:endParaRPr lang="en-US"/>
-          </a:p>
-        </p:txBody>
-      </p:sp>
-      <p:sp>
-        <p:nvSpPr>
-          <p:cNvPr id="3" name="Rectangle 2">
-            <a:extLst>
-              <a:ext uri="{FF2B5EF4-FFF2-40B4-BE49-F238E27FC236}">
-                <a16:creationId xmlns:a16="http://schemas.microsoft.com/office/drawing/2014/main" id="{3D537AA0-9B56-E0B1-ECD5-CF11333DDF93}"/>
-              </a:ext>
-            </a:extLst>
-          </p:cNvPr>
-          <p:cNvSpPr/>
-          <p:nvPr>
-            <p:custDataLst>
-              <p:tags r:id="rId3"/>
-            </p:custDataLst>
-          </p:nvPr>
-        </p:nvSpPr>
-        <p:spPr>
-          <a:xfrm>
-            <a:off x="3112851" y="1000897"/>
-            <a:ext cx="8486226" cy="3855308"/>
-          </a:xfrm>
-          <a:prstGeom prst="rect">
-            <a:avLst/>
-          </a:prstGeom>
-          <a:noFill/>
-          <a:ln w="25400" cap="flat" cmpd="sng" algn="ctr">
-            <a:solidFill>
-              <a:srgbClr val="FFFFFF"/>
-            </a:solidFill>
-            <a:prstDash val="solid"/>
-          </a:ln>
-          <a:effectLst/>
-          <a:extLst>
-            <a:ext uri="{909E8E84-426E-40DD-AFC4-6F175D3DCCD1}">
-              <a14:hiddenFill xmlns:a14="http://schemas.microsoft.com/office/drawing/2010/main">
-                <a:solidFill>
-                  <a:schemeClr val="accent1"/>
-                </a:solidFill>
-              </a14:hiddenFill>
-            </a:ext>
-          </a:extLst>
-        </p:spPr>
-        <p:style>
-          <a:lnRef idx="2">
-            <a:schemeClr val="accent1">
-              <a:shade val="15000"/>
-            </a:schemeClr>
-          </a:lnRef>
-          <a:fillRef idx="1">
-            <a:schemeClr val="accent1"/>
-          </a:fillRef>
-          <a:effectRef idx="0">
-            <a:schemeClr val="accent1"/>
-          </a:effectRef>
-          <a:fontRef idx="minor">
-            <a:schemeClr val="lt1"/>
-          </a:fontRef>
-        </p:style>
-        <p:txBody>
-          <a:bodyPr rtlCol="0" anchor="ctr"/>
-          <a:lstStyle/>
-          <a:p>
-            <a:r>
-              <a:rPr lang="en-US" sz="4000" b="1">
-                <a:solidFill>
-                  <a:srgbClr val="000000"/>
-                </a:solidFill>
-              </a:rPr>
-              <a:t>what’s your experience with using git and GitHub?</a:t>
-            </a:r>
-          </a:p>
-        </p:txBody>
-      </p:sp>
-      <p:sp>
-        <p:nvSpPr>
-          <p:cNvPr id="4" name="Rectangle 3">
-            <a:extLst>
-              <a:ext uri="{FF2B5EF4-FFF2-40B4-BE49-F238E27FC236}">
-                <a16:creationId xmlns:a16="http://schemas.microsoft.com/office/drawing/2014/main" id="{25630FCC-55CC-024B-E375-EF807A6A104A}"/>
-              </a:ext>
-            </a:extLst>
-          </p:cNvPr>
-          <p:cNvSpPr/>
-          <p:nvPr/>
-        </p:nvSpPr>
-        <p:spPr>
-          <a:xfrm>
-            <a:off x="0" y="5820032"/>
-            <a:ext cx="12192001" cy="1037968"/>
-          </a:xfrm>
-          <a:prstGeom prst="rect">
-            <a:avLst/>
-          </a:prstGeom>
-          <a:solidFill>
-            <a:srgbClr val="198038"/>
-          </a:solidFill>
-          <a:ln w="25400" cap="flat" cmpd="sng" algn="ctr">
-            <a:noFill/>
-            <a:prstDash val="solid"/>
-          </a:ln>
-          <a:effectLst/>
-          <a:extLst>
-            <a:ext uri="{91240B29-F687-4F45-9708-019B960494DF}">
-              <a14:hiddenLine xmlns:a14="http://schemas.microsoft.com/office/drawing/2010/main" w="25400" cap="flat" cmpd="sng" algn="ctr">
-                <a:solidFill>
-                  <a:schemeClr val="accent1">
-                    <a:shade val="15000"/>
-                  </a:schemeClr>
-                </a:solidFill>
-                <a:prstDash val="solid"/>
-              </a14:hiddenLine>
-            </a:ext>
-          </a:extLst>
-        </p:spPr>
-        <p:style>
-          <a:lnRef idx="2">
-            <a:schemeClr val="accent1">
-              <a:shade val="15000"/>
-            </a:schemeClr>
-          </a:lnRef>
-          <a:fillRef idx="1">
-            <a:schemeClr val="accent1"/>
-          </a:fillRef>
-          <a:effectRef idx="0">
-            <a:schemeClr val="accent1"/>
-          </a:effectRef>
-          <a:fontRef idx="minor">
-            <a:schemeClr val="lt1"/>
-          </a:fontRef>
-        </p:style>
-        <p:txBody>
-          <a:bodyPr lIns="741155" tIns="259492" rIns="1852888" bIns="203886" rtlCol="0" anchor="ctr">
-            <a:normAutofit fontScale="85000" lnSpcReduction="10000"/>
-          </a:bodyPr>
-          <a:lstStyle/>
-          <a:p>
-            <a:r>
-              <a:rPr lang="en-US" sz="2600">
-                <a:solidFill>
-                  <a:srgbClr val="FFFFFF"/>
-                </a:solidFill>
-              </a:rPr>
-              <a:t>The </a:t>
-            </a:r>
-            <a:r>
-              <a:rPr lang="en-US" sz="2600">
-                <a:solidFill>
-                  <a:srgbClr val="FFFFFF"/>
-                </a:solidFill>
-                <a:hlinkClick r:id="rId7">
-                  <a:extLst>
-                    <a:ext uri="{A12FA001-AC4F-418D-AE19-62706E023703}">
-                      <ahyp:hlinkClr xmlns:ahyp="http://schemas.microsoft.com/office/drawing/2018/hyperlinkcolor" val="tx"/>
-                    </a:ext>
-                  </a:extLst>
-                </a:hlinkClick>
-              </a:rPr>
-              <a:t>Slido app</a:t>
-            </a:r>
-            <a:r>
-              <a:rPr lang="en-US" sz="2600">
-                <a:solidFill>
-                  <a:srgbClr val="FFFFFF"/>
-                </a:solidFill>
-              </a:rPr>
-              <a:t> must be installed on every computer you’re presenting from</a:t>
-            </a:r>
-          </a:p>
-        </p:txBody>
-      </p:sp>
-      <p:pic>
-        <p:nvPicPr>
-          <p:cNvPr id="6" name="Graphic 5">
-            <a:extLst>
-              <a:ext uri="{FF2B5EF4-FFF2-40B4-BE49-F238E27FC236}">
-                <a16:creationId xmlns:a16="http://schemas.microsoft.com/office/drawing/2014/main" id="{FEDB4B62-1C11-7250-77B1-FE4EB35EB7FA}"/>
-              </a:ext>
-            </a:extLst>
-          </p:cNvPr>
-          <p:cNvPicPr>
-            <a:picLocks/>
-          </p:cNvPicPr>
-          <p:nvPr/>
-        </p:nvPicPr>
-        <p:blipFill>
-          <a:blip r:embed="rId8">
-            <a:extLst>
-              <a:ext uri="{96DAC541-7B7A-43D3-8B79-37D633B846F1}">
-                <asvg:svgBlip xmlns:asvg="http://schemas.microsoft.com/office/drawing/2016/SVG/main" r:embed="rId9"/>
-              </a:ext>
-            </a:extLst>
-          </a:blip>
-          <a:stretch>
-            <a:fillRect/>
-          </a:stretch>
-        </p:blipFill>
-        <p:spPr>
-          <a:xfrm>
-            <a:off x="296462" y="6190785"/>
-            <a:ext cx="296462" cy="296462"/>
-          </a:xfrm>
-          <a:prstGeom prst="rect">
-            <a:avLst/>
-          </a:prstGeom>
-        </p:spPr>
-      </p:pic>
-      <p:sp>
-        <p:nvSpPr>
-          <p:cNvPr id="7" name="Trapezoid 6">
-            <a:extLst>
-              <a:ext uri="{FF2B5EF4-FFF2-40B4-BE49-F238E27FC236}">
-                <a16:creationId xmlns:a16="http://schemas.microsoft.com/office/drawing/2014/main" id="{742D59CB-A46C-1EF3-84FF-B1E1FEAF84D0}"/>
-              </a:ext>
-            </a:extLst>
-          </p:cNvPr>
-          <p:cNvSpPr/>
-          <p:nvPr/>
-        </p:nvSpPr>
-        <p:spPr>
-          <a:xfrm rot="2700000">
-            <a:off x="9620371" y="514924"/>
-            <a:ext cx="3335198" cy="778213"/>
-          </a:xfrm>
-          <a:prstGeom prst="trapezoid">
-            <a:avLst>
-              <a:gd name="adj" fmla="val 100000"/>
-            </a:avLst>
-          </a:prstGeom>
-          <a:solidFill>
-            <a:srgbClr val="EDFAF2"/>
-          </a:solidFill>
-          <a:ln w="25400" cap="flat" cmpd="sng" algn="ctr">
-            <a:noFill/>
-            <a:prstDash val="solid"/>
-          </a:ln>
-          <a:effectLst/>
-          <a:extLst>
-            <a:ext uri="{91240B29-F687-4F45-9708-019B960494DF}">
-              <a14:hiddenLine xmlns:a14="http://schemas.microsoft.com/office/drawing/2010/main" w="25400" cap="flat" cmpd="sng" algn="ctr">
-                <a:solidFill>
-                  <a:schemeClr val="accent1">
-                    <a:shade val="15000"/>
-                  </a:schemeClr>
-                </a:solidFill>
-                <a:prstDash val="solid"/>
-              </a14:hiddenLine>
-            </a:ext>
-          </a:extLst>
-        </p:spPr>
-        <p:style>
-          <a:lnRef idx="2">
-            <a:schemeClr val="accent1">
-              <a:shade val="15000"/>
-            </a:schemeClr>
-          </a:lnRef>
-          <a:fillRef idx="1">
-            <a:schemeClr val="accent1"/>
-          </a:fillRef>
-          <a:effectRef idx="0">
-            <a:schemeClr val="accent1"/>
-          </a:effectRef>
-          <a:fontRef idx="minor">
-            <a:schemeClr val="lt1"/>
-          </a:fontRef>
-        </p:style>
-        <p:txBody>
-          <a:bodyPr tIns="0" bIns="0" rtlCol="0" anchor="t">
-            <a:normAutofit fontScale="70000" lnSpcReduction="20000"/>
-          </a:bodyPr>
-          <a:lstStyle/>
-          <a:p>
-            <a:pPr algn="ctr"/>
-            <a:r>
-              <a:rPr lang="en-US" sz="2600" b="1">
-                <a:solidFill>
-                  <a:srgbClr val="198038"/>
-                </a:solidFill>
-              </a:rPr>
-              <a:t>Do not edit
-</a:t>
-            </a:r>
-            <a:r>
-              <a:rPr lang="en-US" sz="2200">
-                <a:solidFill>
-                  <a:srgbClr val="198038"/>
-                </a:solidFill>
-                <a:hlinkClick r:id="rId10">
-                  <a:extLst>
-                    <a:ext uri="{A12FA001-AC4F-418D-AE19-62706E023703}">
-                      <ahyp:hlinkClr xmlns:ahyp="http://schemas.microsoft.com/office/drawing/2018/hyperlinkcolor" val="tx"/>
-                    </a:ext>
-                  </a:extLst>
-                </a:hlinkClick>
-              </a:rPr>
-              <a:t>How to change the design</a:t>
-            </a:r>
-            <a:endParaRPr lang="en-US" sz="2200">
-              <a:solidFill>
-                <a:srgbClr val="198038"/>
-              </a:solidFill>
-            </a:endParaRPr>
-          </a:p>
-        </p:txBody>
-      </p:sp>
-      <p:pic>
-        <p:nvPicPr>
-          <p:cNvPr id="9" name="Graphic 8">
-            <a:extLst>
-              <a:ext uri="{FF2B5EF4-FFF2-40B4-BE49-F238E27FC236}">
-                <a16:creationId xmlns:a16="http://schemas.microsoft.com/office/drawing/2014/main" id="{E06B25FB-C9AD-D6F8-7022-D20B71126CAC}"/>
-              </a:ext>
-            </a:extLst>
-          </p:cNvPr>
-          <p:cNvPicPr>
-            <a:picLocks/>
-          </p:cNvPicPr>
-          <p:nvPr/>
-        </p:nvPicPr>
-        <p:blipFill>
-          <a:blip r:embed="rId11">
-            <a:extLst>
-              <a:ext uri="{96DAC541-7B7A-43D3-8B79-37D633B846F1}">
-                <asvg:svgBlip xmlns:asvg="http://schemas.microsoft.com/office/drawing/2016/SVG/main" r:embed="rId12"/>
-              </a:ext>
-            </a:extLst>
-          </a:blip>
-          <a:stretch>
-            <a:fillRect/>
-          </a:stretch>
-        </p:blipFill>
-        <p:spPr>
-          <a:xfrm>
-            <a:off x="10746748" y="6153727"/>
-            <a:ext cx="1111733" cy="370578"/>
-          </a:xfrm>
-          <a:prstGeom prst="rect">
-            <a:avLst/>
-          </a:prstGeom>
-        </p:spPr>
-      </p:pic>
-    </p:spTree>
-    <p:custDataLst>
-      <p:tags r:id="rId1"/>
-    </p:custDataLst>
-    <p:extLst>
-      <p:ext uri="{BB962C8B-B14F-4D97-AF65-F5344CB8AC3E}">
-        <p14:creationId xmlns:p14="http://schemas.microsoft.com/office/powerpoint/2010/main" val="910772388"/>
-      </p:ext>
-    </p:extLst>
-  </p:cSld>
-  <p:clrMapOvr>
-    <a:masterClrMapping/>
-  </p:clrMapOvr>
-  <p:timing>
-    <p:tnLst>
-      <p:par>
-        <p:cTn id="1" dur="indefinite" restart="never" nodeType="tmRoot">
-          <p:childTnLst>
-            <p:seq concurrent="1" nextAc="seek">
-              <p:cTn id="2" dur="indefinite" nodeType="mainSeq">
-                <p:childTnLst>
-                  <p:par>
-                    <p:cTn id="3" fill="hold">
-                      <p:stCondLst>
-                        <p:cond delay="indefinite"/>
-                      </p:stCondLst>
-                      <p:childTnLst>
-                        <p:par>
-                          <p:cTn id="4" fill="hold">
-                            <p:stCondLst>
-                              <p:cond delay="0"/>
-                            </p:stCondLst>
-                            <p:childTnLst>
-                              <p:par>
-                                <p:cTn id="5" presetID="26" presetClass="emph" presetSubtype="0" fill="hold" grpId="0" nodeType="clickEffect">
-                                  <p:stCondLst>
-                                    <p:cond delay="0"/>
-                                  </p:stCondLst>
-                                  <p:childTnLst>
-                                    <p:animEffect transition="out" filter="fade">
-                                      <p:cBhvr>
-                                        <p:cTn id="6" dur="50" tmFilter="0, 0; .2, .5; .8, .5; 1, 0"/>
-                                        <p:tgtEl>
-                                          <p:spTgt spid="3"/>
-                                        </p:tgtEl>
-                                      </p:cBhvr>
-                                    </p:animEffect>
-                                    <p:animScale>
-                                      <p:cBhvr>
-                                        <p:cTn id="7" dur="25" autoRev="1" fill="hold"/>
-                                        <p:tgtEl>
-                                          <p:spTgt spid="3"/>
-                                        </p:tgtEl>
-                                      </p:cBhvr>
-                                      <p:by x="105000" y="105000"/>
-                                    </p:animScale>
-                                  </p:childTnLst>
-                                </p:cTn>
-                              </p:par>
-                            </p:childTnLst>
-                          </p:cTn>
-                        </p:par>
-                      </p:childTnLst>
-                    </p:cTn>
-                  </p:par>
-                </p:childTnLst>
-              </p:cTn>
-              <p:prevCondLst>
-                <p:cond evt="onPrev" delay="0">
-                  <p:tgtEl>
-                    <p:sldTgt/>
-                  </p:tgtEl>
-                </p:cond>
-              </p:prevCondLst>
-              <p:nextCondLst>
-                <p:cond evt="onNext" delay="0">
-                  <p:tgtEl>
-                    <p:sldTgt/>
-                  </p:tgtEl>
-                </p:cond>
-              </p:nextCondLst>
-            </p:seq>
-          </p:childTnLst>
-        </p:cTn>
-      </p:par>
-    </p:tnLst>
-    <p:bldLst>
-      <p:bldP spid="3" grpId="0" animBg="1"/>
-    </p:bldLst>
-  </p:timing>
-</p:sld>
-</file>
-
-<file path=ppt/slides/slide35.xml><?xml version="1.0" encoding="utf-8"?>
 <p:sld xmlns:a="http://schemas.openxmlformats.org/drawingml/2006/main" xmlns:r="http://schemas.openxmlformats.org/officeDocument/2006/relationships" xmlns:p="http://schemas.openxmlformats.org/presentationml/2006/main">
   <p:cSld>
     <p:spTree>
@@ -24869,7 +24123,7 @@
 </p:sld>
 </file>
 
-<file path=ppt/slides/slide36.xml><?xml version="1.0" encoding="utf-8"?>
+<file path=ppt/slides/slide35.xml><?xml version="1.0" encoding="utf-8"?>
 <p:sld xmlns:a="http://schemas.openxmlformats.org/drawingml/2006/main" xmlns:r="http://schemas.openxmlformats.org/officeDocument/2006/relationships" xmlns:p="http://schemas.openxmlformats.org/presentationml/2006/main">
   <p:cSld>
     <p:spTree>
@@ -28773,7 +28027,7 @@
 </p:sld>
 </file>
 
-<file path=ppt/slides/slide37.xml><?xml version="1.0" encoding="utf-8"?>
+<file path=ppt/slides/slide36.xml><?xml version="1.0" encoding="utf-8"?>
 <p:sld xmlns:a="http://schemas.openxmlformats.org/drawingml/2006/main" xmlns:r="http://schemas.openxmlformats.org/officeDocument/2006/relationships" xmlns:p="http://schemas.openxmlformats.org/presentationml/2006/main">
   <p:cSld>
     <p:spTree>
@@ -29251,7 +28505,7 @@
 </p:sld>
 </file>
 
-<file path=ppt/slides/slide38.xml><?xml version="1.0" encoding="utf-8"?>
+<file path=ppt/slides/slide37.xml><?xml version="1.0" encoding="utf-8"?>
 <p:sld xmlns:a="http://schemas.openxmlformats.org/drawingml/2006/main" xmlns:r="http://schemas.openxmlformats.org/officeDocument/2006/relationships" xmlns:p="http://schemas.openxmlformats.org/presentationml/2006/main">
   <p:cSld>
     <p:spTree>
@@ -31884,7 +31138,7 @@
 </p:sld>
 </file>
 
-<file path=ppt/slides/slide39.xml><?xml version="1.0" encoding="utf-8"?>
+<file path=ppt/slides/slide38.xml><?xml version="1.0" encoding="utf-8"?>
 <p:sld xmlns:a="http://schemas.openxmlformats.org/drawingml/2006/main" xmlns:r="http://schemas.openxmlformats.org/officeDocument/2006/relationships" xmlns:p="http://schemas.openxmlformats.org/presentationml/2006/main">
   <p:cSld>
     <p:spTree>
@@ -33024,533 +32278,7 @@
 </p:sld>
 </file>
 
-<file path=ppt/slides/slide4.xml><?xml version="1.0" encoding="utf-8"?>
-<p:sld xmlns:a="http://schemas.openxmlformats.org/drawingml/2006/main" xmlns:r="http://schemas.openxmlformats.org/officeDocument/2006/relationships" xmlns:p="http://schemas.openxmlformats.org/presentationml/2006/main" showMasterSp="0">
-  <p:cSld>
-    <p:bg>
-      <p:bgPr>
-        <a:solidFill>
-          <a:srgbClr val="FFFFFF"/>
-        </a:solidFill>
-        <a:effectLst/>
-      </p:bgPr>
-    </p:bg>
-    <p:spTree>
-      <p:nvGrpSpPr>
-        <p:cNvPr id="1" name=""/>
-        <p:cNvGrpSpPr/>
-        <p:nvPr/>
-      </p:nvGrpSpPr>
-      <p:grpSpPr>
-        <a:xfrm>
-          <a:off x="0" y="0"/>
-          <a:ext cx="0" cy="0"/>
-          <a:chOff x="0" y="0"/>
-          <a:chExt cx="0" cy="0"/>
-        </a:xfrm>
-      </p:grpSpPr>
-      <p:sp>
-        <p:nvSpPr>
-          <p:cNvPr id="2" name="Rectangle 1">
-            <a:extLst>
-              <a:ext uri="{FF2B5EF4-FFF2-40B4-BE49-F238E27FC236}">
-                <a16:creationId xmlns:a16="http://schemas.microsoft.com/office/drawing/2014/main" id="{71D4F718-8738-88A4-E1D4-CFD3EB1D23D6}"/>
-              </a:ext>
-            </a:extLst>
-          </p:cNvPr>
-          <p:cNvSpPr/>
-          <p:nvPr>
-            <p:custDataLst>
-              <p:tags r:id="rId2"/>
-            </p:custDataLst>
-          </p:nvPr>
-        </p:nvSpPr>
-        <p:spPr>
-          <a:xfrm>
-            <a:off x="444693" y="1742703"/>
-            <a:ext cx="2371696" cy="2371696"/>
-          </a:xfrm>
-          <a:prstGeom prst="rect">
-            <a:avLst/>
-          </a:prstGeom>
-          <a:blipFill>
-            <a:blip r:embed="rId6">
-              <a:extLst>
-                <a:ext uri="{96DAC541-7B7A-43D3-8B79-37D633B846F1}">
-                  <asvg:svgBlip xmlns:asvg="http://schemas.microsoft.com/office/drawing/2016/SVG/main" r:embed="rId7"/>
-                </a:ext>
-              </a:extLst>
-            </a:blip>
-            <a:stretch>
-              <a:fillRect/>
-            </a:stretch>
-          </a:blipFill>
-          <a:ln>
-            <a:solidFill>
-              <a:srgbClr val="FFFFFF"/>
-            </a:solidFill>
-          </a:ln>
-        </p:spPr>
-        <p:style>
-          <a:lnRef idx="2">
-            <a:schemeClr val="accent1">
-              <a:shade val="15000"/>
-            </a:schemeClr>
-          </a:lnRef>
-          <a:fillRef idx="1">
-            <a:schemeClr val="accent1"/>
-          </a:fillRef>
-          <a:effectRef idx="0">
-            <a:schemeClr val="accent1"/>
-          </a:effectRef>
-          <a:fontRef idx="minor">
-            <a:schemeClr val="lt1"/>
-          </a:fontRef>
-        </p:style>
-        <p:txBody>
-          <a:bodyPr rtlCol="0" anchor="ctr"/>
-          <a:lstStyle/>
-          <a:p>
-            <a:pPr algn="ctr"/>
-            <a:endParaRPr lang="en-US"/>
-          </a:p>
-        </p:txBody>
-      </p:sp>
-      <p:sp>
-        <p:nvSpPr>
-          <p:cNvPr id="3" name="Rectangle 2">
-            <a:extLst>
-              <a:ext uri="{FF2B5EF4-FFF2-40B4-BE49-F238E27FC236}">
-                <a16:creationId xmlns:a16="http://schemas.microsoft.com/office/drawing/2014/main" id="{76AA0375-A7E3-904A-036E-8D3EE2850AFD}"/>
-              </a:ext>
-            </a:extLst>
-          </p:cNvPr>
-          <p:cNvSpPr/>
-          <p:nvPr>
-            <p:custDataLst>
-              <p:tags r:id="rId3"/>
-            </p:custDataLst>
-          </p:nvPr>
-        </p:nvSpPr>
-        <p:spPr>
-          <a:xfrm>
-            <a:off x="3112851" y="1000897"/>
-            <a:ext cx="8486226" cy="3855308"/>
-          </a:xfrm>
-          <a:prstGeom prst="rect">
-            <a:avLst/>
-          </a:prstGeom>
-          <a:noFill/>
-          <a:ln w="25400" cap="flat" cmpd="sng" algn="ctr">
-            <a:solidFill>
-              <a:srgbClr val="FFFFFF"/>
-            </a:solidFill>
-            <a:prstDash val="solid"/>
-          </a:ln>
-          <a:effectLst/>
-          <a:extLst>
-            <a:ext uri="{909E8E84-426E-40DD-AFC4-6F175D3DCCD1}">
-              <a14:hiddenFill xmlns:a14="http://schemas.microsoft.com/office/drawing/2010/main">
-                <a:solidFill>
-                  <a:schemeClr val="accent1"/>
-                </a:solidFill>
-              </a14:hiddenFill>
-            </a:ext>
-          </a:extLst>
-        </p:spPr>
-        <p:style>
-          <a:lnRef idx="2">
-            <a:schemeClr val="accent1">
-              <a:shade val="15000"/>
-            </a:schemeClr>
-          </a:lnRef>
-          <a:fillRef idx="1">
-            <a:schemeClr val="accent1"/>
-          </a:fillRef>
-          <a:effectRef idx="0">
-            <a:schemeClr val="accent1"/>
-          </a:effectRef>
-          <a:fontRef idx="minor">
-            <a:schemeClr val="lt1"/>
-          </a:fontRef>
-        </p:style>
-        <p:txBody>
-          <a:bodyPr rtlCol="0" anchor="ctr"/>
-          <a:lstStyle/>
-          <a:p>
-            <a:r>
-              <a:rPr lang="en-US" sz="3700" b="1">
-                <a:solidFill>
-                  <a:srgbClr val="000000"/>
-                </a:solidFill>
-              </a:rPr>
-              <a:t>What model selection strategy is your group considering for the Donors Choose project?
-</a:t>
-            </a:r>
-          </a:p>
-        </p:txBody>
-      </p:sp>
-      <p:sp>
-        <p:nvSpPr>
-          <p:cNvPr id="4" name="Rectangle 3">
-            <a:extLst>
-              <a:ext uri="{FF2B5EF4-FFF2-40B4-BE49-F238E27FC236}">
-                <a16:creationId xmlns:a16="http://schemas.microsoft.com/office/drawing/2014/main" id="{BBCE8261-B973-7486-7CA8-49BF3178EB3B}"/>
-              </a:ext>
-            </a:extLst>
-          </p:cNvPr>
-          <p:cNvSpPr/>
-          <p:nvPr/>
-        </p:nvSpPr>
-        <p:spPr>
-          <a:xfrm>
-            <a:off x="0" y="5820032"/>
-            <a:ext cx="12192001" cy="1037968"/>
-          </a:xfrm>
-          <a:prstGeom prst="rect">
-            <a:avLst/>
-          </a:prstGeom>
-          <a:solidFill>
-            <a:srgbClr val="198038"/>
-          </a:solidFill>
-          <a:ln w="25400" cap="flat" cmpd="sng" algn="ctr">
-            <a:noFill/>
-            <a:prstDash val="solid"/>
-          </a:ln>
-          <a:effectLst/>
-          <a:extLst>
-            <a:ext uri="{91240B29-F687-4F45-9708-019B960494DF}">
-              <a14:hiddenLine xmlns:a14="http://schemas.microsoft.com/office/drawing/2010/main" w="25400" cap="flat" cmpd="sng" algn="ctr">
-                <a:solidFill>
-                  <a:schemeClr val="accent1">
-                    <a:shade val="15000"/>
-                  </a:schemeClr>
-                </a:solidFill>
-                <a:prstDash val="solid"/>
-              </a14:hiddenLine>
-            </a:ext>
-          </a:extLst>
-        </p:spPr>
-        <p:style>
-          <a:lnRef idx="2">
-            <a:schemeClr val="accent1">
-              <a:shade val="15000"/>
-            </a:schemeClr>
-          </a:lnRef>
-          <a:fillRef idx="1">
-            <a:schemeClr val="accent1"/>
-          </a:fillRef>
-          <a:effectRef idx="0">
-            <a:schemeClr val="accent1"/>
-          </a:effectRef>
-          <a:fontRef idx="minor">
-            <a:schemeClr val="lt1"/>
-          </a:fontRef>
-        </p:style>
-        <p:txBody>
-          <a:bodyPr lIns="741155" tIns="259492" rIns="1852888" bIns="203886" rtlCol="0" anchor="ctr">
-            <a:normAutofit fontScale="85000" lnSpcReduction="10000"/>
-          </a:bodyPr>
-          <a:lstStyle/>
-          <a:p>
-            <a:r>
-              <a:rPr lang="en-US" sz="2600">
-                <a:solidFill>
-                  <a:srgbClr val="FFFFFF"/>
-                </a:solidFill>
-              </a:rPr>
-              <a:t>The </a:t>
-            </a:r>
-            <a:r>
-              <a:rPr lang="en-US" sz="2600">
-                <a:solidFill>
-                  <a:srgbClr val="FFFFFF"/>
-                </a:solidFill>
-                <a:hlinkClick r:id="rId8">
-                  <a:extLst>
-                    <a:ext uri="{A12FA001-AC4F-418D-AE19-62706E023703}">
-                      <ahyp:hlinkClr xmlns:ahyp="http://schemas.microsoft.com/office/drawing/2018/hyperlinkcolor" val="tx"/>
-                    </a:ext>
-                  </a:extLst>
-                </a:hlinkClick>
-              </a:rPr>
-              <a:t>Slido app</a:t>
-            </a:r>
-            <a:r>
-              <a:rPr lang="en-US" sz="2600">
-                <a:solidFill>
-                  <a:srgbClr val="FFFFFF"/>
-                </a:solidFill>
-              </a:rPr>
-              <a:t> must be installed on every computer you’re presenting from</a:t>
-            </a:r>
-          </a:p>
-        </p:txBody>
-      </p:sp>
-      <p:pic>
-        <p:nvPicPr>
-          <p:cNvPr id="6" name="Graphic 5">
-            <a:extLst>
-              <a:ext uri="{FF2B5EF4-FFF2-40B4-BE49-F238E27FC236}">
-                <a16:creationId xmlns:a16="http://schemas.microsoft.com/office/drawing/2014/main" id="{422A0AC7-B4E5-99C3-395B-0C2A9E11CBD6}"/>
-              </a:ext>
-            </a:extLst>
-          </p:cNvPr>
-          <p:cNvPicPr>
-            <a:picLocks/>
-          </p:cNvPicPr>
-          <p:nvPr/>
-        </p:nvPicPr>
-        <p:blipFill>
-          <a:blip r:embed="rId9">
-            <a:extLst>
-              <a:ext uri="{96DAC541-7B7A-43D3-8B79-37D633B846F1}">
-                <asvg:svgBlip xmlns:asvg="http://schemas.microsoft.com/office/drawing/2016/SVG/main" r:embed="rId10"/>
-              </a:ext>
-            </a:extLst>
-          </a:blip>
-          <a:stretch>
-            <a:fillRect/>
-          </a:stretch>
-        </p:blipFill>
-        <p:spPr>
-          <a:xfrm>
-            <a:off x="296462" y="6190785"/>
-            <a:ext cx="296462" cy="296462"/>
-          </a:xfrm>
-          <a:prstGeom prst="rect">
-            <a:avLst/>
-          </a:prstGeom>
-        </p:spPr>
-      </p:pic>
-      <p:sp>
-        <p:nvSpPr>
-          <p:cNvPr id="7" name="Trapezoid 6">
-            <a:extLst>
-              <a:ext uri="{FF2B5EF4-FFF2-40B4-BE49-F238E27FC236}">
-                <a16:creationId xmlns:a16="http://schemas.microsoft.com/office/drawing/2014/main" id="{139E3585-2076-D5F6-D46E-15BE2332FA36}"/>
-              </a:ext>
-            </a:extLst>
-          </p:cNvPr>
-          <p:cNvSpPr/>
-          <p:nvPr/>
-        </p:nvSpPr>
-        <p:spPr>
-          <a:xfrm rot="2700000">
-            <a:off x="9620371" y="514924"/>
-            <a:ext cx="3335198" cy="778213"/>
-          </a:xfrm>
-          <a:prstGeom prst="trapezoid">
-            <a:avLst>
-              <a:gd name="adj" fmla="val 100000"/>
-            </a:avLst>
-          </a:prstGeom>
-          <a:solidFill>
-            <a:srgbClr val="EDFAF2"/>
-          </a:solidFill>
-          <a:ln w="25400" cap="flat" cmpd="sng" algn="ctr">
-            <a:noFill/>
-            <a:prstDash val="solid"/>
-          </a:ln>
-          <a:effectLst/>
-          <a:extLst>
-            <a:ext uri="{91240B29-F687-4F45-9708-019B960494DF}">
-              <a14:hiddenLine xmlns:a14="http://schemas.microsoft.com/office/drawing/2010/main" w="25400" cap="flat" cmpd="sng" algn="ctr">
-                <a:solidFill>
-                  <a:schemeClr val="accent1">
-                    <a:shade val="15000"/>
-                  </a:schemeClr>
-                </a:solidFill>
-                <a:prstDash val="solid"/>
-              </a14:hiddenLine>
-            </a:ext>
-          </a:extLst>
-        </p:spPr>
-        <p:style>
-          <a:lnRef idx="2">
-            <a:schemeClr val="accent1">
-              <a:shade val="15000"/>
-            </a:schemeClr>
-          </a:lnRef>
-          <a:fillRef idx="1">
-            <a:schemeClr val="accent1"/>
-          </a:fillRef>
-          <a:effectRef idx="0">
-            <a:schemeClr val="accent1"/>
-          </a:effectRef>
-          <a:fontRef idx="minor">
-            <a:schemeClr val="lt1"/>
-          </a:fontRef>
-        </p:style>
-        <p:txBody>
-          <a:bodyPr tIns="0" bIns="0" rtlCol="0" anchor="t">
-            <a:normAutofit fontScale="70000" lnSpcReduction="20000"/>
-          </a:bodyPr>
-          <a:lstStyle/>
-          <a:p>
-            <a:pPr algn="ctr"/>
-            <a:r>
-              <a:rPr lang="en-US" sz="2600" b="1" dirty="0">
-                <a:solidFill>
-                  <a:srgbClr val="198038"/>
-                </a:solidFill>
-              </a:rPr>
-              <a:t>Do not edit
-</a:t>
-            </a:r>
-            <a:r>
-              <a:rPr lang="en-US" sz="2200" dirty="0">
-                <a:solidFill>
-                  <a:srgbClr val="198038"/>
-                </a:solidFill>
-                <a:hlinkClick r:id="rId11">
-                  <a:extLst>
-                    <a:ext uri="{A12FA001-AC4F-418D-AE19-62706E023703}">
-                      <ahyp:hlinkClr xmlns:ahyp="http://schemas.microsoft.com/office/drawing/2018/hyperlinkcolor" val="tx"/>
-                    </a:ext>
-                  </a:extLst>
-                </a:hlinkClick>
-              </a:rPr>
-              <a:t>How to change the design</a:t>
-            </a:r>
-            <a:endParaRPr lang="en-US" sz="2200" dirty="0">
-              <a:solidFill>
-                <a:srgbClr val="198038"/>
-              </a:solidFill>
-            </a:endParaRPr>
-          </a:p>
-        </p:txBody>
-      </p:sp>
-      <p:pic>
-        <p:nvPicPr>
-          <p:cNvPr id="9" name="Graphic 8">
-            <a:extLst>
-              <a:ext uri="{FF2B5EF4-FFF2-40B4-BE49-F238E27FC236}">
-                <a16:creationId xmlns:a16="http://schemas.microsoft.com/office/drawing/2014/main" id="{E43D7BBD-4F5A-B35D-283F-AE01D08F9261}"/>
-              </a:ext>
-            </a:extLst>
-          </p:cNvPr>
-          <p:cNvPicPr>
-            <a:picLocks/>
-          </p:cNvPicPr>
-          <p:nvPr/>
-        </p:nvPicPr>
-        <p:blipFill>
-          <a:blip r:embed="rId12">
-            <a:extLst>
-              <a:ext uri="{96DAC541-7B7A-43D3-8B79-37D633B846F1}">
-                <asvg:svgBlip xmlns:asvg="http://schemas.microsoft.com/office/drawing/2016/SVG/main" r:embed="rId13"/>
-              </a:ext>
-            </a:extLst>
-          </a:blip>
-          <a:stretch>
-            <a:fillRect/>
-          </a:stretch>
-        </p:blipFill>
-        <p:spPr>
-          <a:xfrm>
-            <a:off x="10746748" y="6153727"/>
-            <a:ext cx="1111733" cy="370578"/>
-          </a:xfrm>
-          <a:prstGeom prst="rect">
-            <a:avLst/>
-          </a:prstGeom>
-        </p:spPr>
-      </p:pic>
-    </p:spTree>
-    <p:custDataLst>
-      <p:tags r:id="rId1"/>
-    </p:custDataLst>
-    <p:extLst>
-      <p:ext uri="{BB962C8B-B14F-4D97-AF65-F5344CB8AC3E}">
-        <p14:creationId xmlns:p14="http://schemas.microsoft.com/office/powerpoint/2010/main" val="4202054108"/>
-      </p:ext>
-    </p:extLst>
-  </p:cSld>
-  <p:clrMapOvr>
-    <a:masterClrMapping/>
-  </p:clrMapOvr>
-  <p:timing>
-    <p:tnLst>
-      <p:par>
-        <p:cTn id="1" dur="indefinite" restart="never" nodeType="tmRoot">
-          <p:childTnLst>
-            <p:seq concurrent="1" nextAc="seek">
-              <p:cTn id="2" dur="indefinite" nodeType="mainSeq">
-                <p:childTnLst>
-                  <p:par>
-                    <p:cTn id="3" fill="hold">
-                      <p:stCondLst>
-                        <p:cond delay="indefinite"/>
-                      </p:stCondLst>
-                      <p:childTnLst>
-                        <p:par>
-                          <p:cTn id="4" fill="hold">
-                            <p:stCondLst>
-                              <p:cond delay="0"/>
-                            </p:stCondLst>
-                            <p:childTnLst>
-                              <p:par>
-                                <p:cTn id="5" presetID="26" presetClass="emph" presetSubtype="0" fill="hold" grpId="0" nodeType="clickEffect">
-                                  <p:stCondLst>
-                                    <p:cond delay="0"/>
-                                  </p:stCondLst>
-                                  <p:childTnLst>
-                                    <p:animEffect transition="out" filter="fade">
-                                      <p:cBhvr>
-                                        <p:cTn id="6" dur="50" tmFilter="0, 0; .2, .5; .8, .5; 1, 0"/>
-                                        <p:tgtEl>
-                                          <p:spTgt spid="3"/>
-                                        </p:tgtEl>
-                                      </p:cBhvr>
-                                    </p:animEffect>
-                                    <p:animScale>
-                                      <p:cBhvr>
-                                        <p:cTn id="7" dur="25" autoRev="1" fill="hold"/>
-                                        <p:tgtEl>
-                                          <p:spTgt spid="3"/>
-                                        </p:tgtEl>
-                                      </p:cBhvr>
-                                      <p:by x="105000" y="105000"/>
-                                    </p:animScale>
-                                  </p:childTnLst>
-                                </p:cTn>
-                              </p:par>
-                            </p:childTnLst>
-                          </p:cTn>
-                        </p:par>
-                      </p:childTnLst>
-                    </p:cTn>
-                  </p:par>
-                </p:childTnLst>
-              </p:cTn>
-              <p:prevCondLst>
-                <p:cond evt="onPrev" delay="0">
-                  <p:tgtEl>
-                    <p:sldTgt/>
-                  </p:tgtEl>
-                </p:cond>
-              </p:prevCondLst>
-              <p:nextCondLst>
-                <p:cond evt="onNext" delay="0">
-                  <p:tgtEl>
-                    <p:sldTgt/>
-                  </p:tgtEl>
-                </p:cond>
-              </p:nextCondLst>
-            </p:seq>
-          </p:childTnLst>
-        </p:cTn>
-      </p:par>
-    </p:tnLst>
-    <p:bldLst>
-      <p:bldP spid="3" grpId="0" animBg="1"/>
-    </p:bldLst>
-  </p:timing>
-</p:sld>
-</file>
-
-<file path=ppt/slides/slide40.xml><?xml version="1.0" encoding="utf-8"?>
+<file path=ppt/slides/slide39.xml><?xml version="1.0" encoding="utf-8"?>
 <p:sld xmlns:a="http://schemas.openxmlformats.org/drawingml/2006/main" xmlns:r="http://schemas.openxmlformats.org/officeDocument/2006/relationships" xmlns:p="http://schemas.openxmlformats.org/presentationml/2006/main">
   <p:cSld>
     <p:spTree>
@@ -34689,7 +33417,557 @@
 </p:sld>
 </file>
 
-<file path=ppt/slides/slide41.xml><?xml version="1.0" encoding="utf-8"?>
+<file path=ppt/slides/slide4.xml><?xml version="1.0" encoding="utf-8"?>
+<p:sld xmlns:a="http://schemas.openxmlformats.org/drawingml/2006/main" xmlns:r="http://schemas.openxmlformats.org/officeDocument/2006/relationships" xmlns:p="http://schemas.openxmlformats.org/presentationml/2006/main" showMasterSp="0">
+  <p:cSld>
+    <p:bg>
+      <p:bgPr>
+        <a:solidFill>
+          <a:srgbClr val="FFFFFF"/>
+        </a:solidFill>
+        <a:effectLst/>
+      </p:bgPr>
+    </p:bg>
+    <p:spTree>
+      <p:nvGrpSpPr>
+        <p:cNvPr id="1" name=""/>
+        <p:cNvGrpSpPr/>
+        <p:nvPr/>
+      </p:nvGrpSpPr>
+      <p:grpSpPr>
+        <a:xfrm>
+          <a:off x="0" y="0"/>
+          <a:ext cx="0" cy="0"/>
+          <a:chOff x="0" y="0"/>
+          <a:chExt cx="0" cy="0"/>
+        </a:xfrm>
+      </p:grpSpPr>
+      <p:sp>
+        <p:nvSpPr>
+          <p:cNvPr id="2" name="Rectangle 1">
+            <a:extLst>
+              <a:ext uri="{FF2B5EF4-FFF2-40B4-BE49-F238E27FC236}">
+                <a16:creationId xmlns:a16="http://schemas.microsoft.com/office/drawing/2014/main" id="{9E77A53D-8ACF-4BAF-4B38-5CE69E5F645C}"/>
+              </a:ext>
+            </a:extLst>
+          </p:cNvPr>
+          <p:cNvSpPr/>
+          <p:nvPr>
+            <p:custDataLst>
+              <p:tags r:id="rId2"/>
+            </p:custDataLst>
+          </p:nvPr>
+        </p:nvSpPr>
+        <p:spPr>
+          <a:xfrm>
+            <a:off x="444693" y="1742703"/>
+            <a:ext cx="2371696" cy="2371696"/>
+          </a:xfrm>
+          <a:prstGeom prst="rect">
+            <a:avLst/>
+          </a:prstGeom>
+          <a:blipFill>
+            <a:blip>
+              <a:extLst>
+                <a:ext uri="{96DAC541-7B7A-43D3-8B79-37D633B846F1}">
+                  <asvg:svgBlip xmlns:asvg="http://schemas.microsoft.com/office/drawing/2016/SVG/main" r:embed="rId7"/>
+                </a:ext>
+              </a:extLst>
+            </a:blip>
+            <a:stretch>
+              <a:fillRect/>
+            </a:stretch>
+          </a:blipFill>
+          <a:ln w="25400" cap="flat" cmpd="sng" algn="ctr">
+            <a:noFill/>
+            <a:prstDash val="solid"/>
+          </a:ln>
+          <a:effectLst/>
+          <a:extLst>
+            <a:ext uri="{91240B29-F687-4F45-9708-019B960494DF}">
+              <a14:hiddenLine xmlns:a14="http://schemas.microsoft.com/office/drawing/2010/main" w="25400" cap="flat" cmpd="sng" algn="ctr">
+                <a:solidFill>
+                  <a:srgbClr val="FFFFFF"/>
+                </a:solidFill>
+                <a:prstDash val="solid"/>
+              </a14:hiddenLine>
+            </a:ext>
+          </a:extLst>
+        </p:spPr>
+        <p:style>
+          <a:lnRef idx="2">
+            <a:schemeClr val="accent1">
+              <a:shade val="15000"/>
+            </a:schemeClr>
+          </a:lnRef>
+          <a:fillRef idx="1">
+            <a:schemeClr val="accent1"/>
+          </a:fillRef>
+          <a:effectRef idx="0">
+            <a:schemeClr val="accent1"/>
+          </a:effectRef>
+          <a:fontRef idx="minor">
+            <a:schemeClr val="lt1"/>
+          </a:fontRef>
+        </p:style>
+        <p:txBody>
+          <a:bodyPr rtlCol="0" anchor="ctr"/>
+          <a:lstStyle/>
+          <a:p>
+            <a:pPr algn="ctr"/>
+            <a:endParaRPr lang="en-US"/>
+          </a:p>
+        </p:txBody>
+      </p:sp>
+      <p:sp>
+        <p:nvSpPr>
+          <p:cNvPr id="3" name="Rectangle 2">
+            <a:extLst>
+              <a:ext uri="{FF2B5EF4-FFF2-40B4-BE49-F238E27FC236}">
+                <a16:creationId xmlns:a16="http://schemas.microsoft.com/office/drawing/2014/main" id="{D74F899F-FE60-6768-AB0D-FB82AA92A142}"/>
+              </a:ext>
+            </a:extLst>
+          </p:cNvPr>
+          <p:cNvSpPr/>
+          <p:nvPr>
+            <p:custDataLst>
+              <p:tags r:id="rId3"/>
+            </p:custDataLst>
+          </p:nvPr>
+        </p:nvSpPr>
+        <p:spPr>
+          <a:xfrm>
+            <a:off x="3112851" y="1000897"/>
+            <a:ext cx="8486226" cy="3855308"/>
+          </a:xfrm>
+          <a:prstGeom prst="rect">
+            <a:avLst/>
+          </a:prstGeom>
+          <a:noFill/>
+          <a:ln w="25400" cap="flat" cmpd="sng" algn="ctr">
+            <a:noFill/>
+            <a:prstDash val="solid"/>
+          </a:ln>
+          <a:effectLst/>
+          <a:extLst>
+            <a:ext uri="{909E8E84-426E-40DD-AFC4-6F175D3DCCD1}">
+              <a14:hiddenFill xmlns:a14="http://schemas.microsoft.com/office/drawing/2010/main">
+                <a:solidFill>
+                  <a:schemeClr val="accent1"/>
+                </a:solidFill>
+              </a14:hiddenFill>
+            </a:ext>
+            <a:ext uri="{91240B29-F687-4F45-9708-019B960494DF}">
+              <a14:hiddenLine xmlns:a14="http://schemas.microsoft.com/office/drawing/2010/main" w="25400" cap="flat" cmpd="sng" algn="ctr">
+                <a:solidFill>
+                  <a:srgbClr val="FFFFFF"/>
+                </a:solidFill>
+                <a:prstDash val="solid"/>
+              </a14:hiddenLine>
+            </a:ext>
+          </a:extLst>
+        </p:spPr>
+        <p:style>
+          <a:lnRef idx="2">
+            <a:schemeClr val="accent1">
+              <a:shade val="15000"/>
+            </a:schemeClr>
+          </a:lnRef>
+          <a:fillRef idx="1">
+            <a:schemeClr val="accent1"/>
+          </a:fillRef>
+          <a:effectRef idx="0">
+            <a:schemeClr val="accent1"/>
+          </a:effectRef>
+          <a:fontRef idx="minor">
+            <a:schemeClr val="lt1"/>
+          </a:fontRef>
+        </p:style>
+        <p:txBody>
+          <a:bodyPr rtlCol="0" anchor="ctr"/>
+          <a:lstStyle/>
+          <a:p>
+            <a:r>
+              <a:rPr lang="en-US" sz="4000" b="1">
+                <a:solidFill>
+                  <a:srgbClr val="000000"/>
+                </a:solidFill>
+              </a:rPr>
+              <a:t>What model selection strategy is your group considering for your project?
+</a:t>
+            </a:r>
+          </a:p>
+        </p:txBody>
+      </p:sp>
+      <p:sp>
+        <p:nvSpPr>
+          <p:cNvPr id="4" name="Rectangle 3">
+            <a:extLst>
+              <a:ext uri="{FF2B5EF4-FFF2-40B4-BE49-F238E27FC236}">
+                <a16:creationId xmlns:a16="http://schemas.microsoft.com/office/drawing/2014/main" id="{29626887-C08E-18C9-1755-6DCB8D7E362B}"/>
+              </a:ext>
+            </a:extLst>
+          </p:cNvPr>
+          <p:cNvSpPr/>
+          <p:nvPr>
+            <p:custDataLst>
+              <p:tags r:id="rId4"/>
+            </p:custDataLst>
+          </p:nvPr>
+        </p:nvSpPr>
+        <p:spPr>
+          <a:xfrm>
+            <a:off x="0" y="5820032"/>
+            <a:ext cx="12192001" cy="1037968"/>
+          </a:xfrm>
+          <a:prstGeom prst="rect">
+            <a:avLst/>
+          </a:prstGeom>
+          <a:solidFill>
+            <a:srgbClr val="198038"/>
+          </a:solidFill>
+          <a:ln w="25400" cap="flat" cmpd="sng" algn="ctr">
+            <a:noFill/>
+            <a:prstDash val="solid"/>
+          </a:ln>
+          <a:effectLst/>
+          <a:extLst>
+            <a:ext uri="{91240B29-F687-4F45-9708-019B960494DF}">
+              <a14:hiddenLine xmlns:a14="http://schemas.microsoft.com/office/drawing/2010/main" w="25400" cap="flat" cmpd="sng" algn="ctr">
+                <a:solidFill>
+                  <a:schemeClr val="accent1">
+                    <a:shade val="15000"/>
+                  </a:schemeClr>
+                </a:solidFill>
+                <a:prstDash val="solid"/>
+              </a14:hiddenLine>
+            </a:ext>
+          </a:extLst>
+        </p:spPr>
+        <p:style>
+          <a:lnRef idx="2">
+            <a:schemeClr val="accent1">
+              <a:shade val="15000"/>
+            </a:schemeClr>
+          </a:lnRef>
+          <a:fillRef idx="1">
+            <a:schemeClr val="accent1"/>
+          </a:fillRef>
+          <a:effectRef idx="0">
+            <a:schemeClr val="accent1"/>
+          </a:effectRef>
+          <a:fontRef idx="minor">
+            <a:schemeClr val="lt1"/>
+          </a:fontRef>
+        </p:style>
+        <p:txBody>
+          <a:bodyPr lIns="741155" tIns="259492" rIns="1852888" bIns="203886" rtlCol="0" anchor="ctr">
+            <a:normAutofit fontScale="85000" lnSpcReduction="10000"/>
+          </a:bodyPr>
+          <a:lstStyle/>
+          <a:p>
+            <a:r>
+              <a:rPr lang="en-US" sz="2600">
+                <a:solidFill>
+                  <a:srgbClr val="FFFFFF"/>
+                </a:solidFill>
+              </a:rPr>
+              <a:t>The </a:t>
+            </a:r>
+            <a:r>
+              <a:rPr lang="en-US" sz="2600">
+                <a:solidFill>
+                  <a:srgbClr val="FFFFFF"/>
+                </a:solidFill>
+                <a:hlinkClick r:id="rId8">
+                  <a:extLst>
+                    <a:ext uri="{A12FA001-AC4F-418D-AE19-62706E023703}">
+                      <ahyp:hlinkClr xmlns:ahyp="http://schemas.microsoft.com/office/drawing/2018/hyperlinkcolor" val="tx"/>
+                    </a:ext>
+                  </a:extLst>
+                </a:hlinkClick>
+              </a:rPr>
+              <a:t>Slido app</a:t>
+            </a:r>
+            <a:r>
+              <a:rPr lang="en-US" sz="2600">
+                <a:solidFill>
+                  <a:srgbClr val="FFFFFF"/>
+                </a:solidFill>
+              </a:rPr>
+              <a:t> must be installed on every computer you’re presenting from</a:t>
+            </a:r>
+          </a:p>
+        </p:txBody>
+      </p:sp>
+      <p:pic>
+        <p:nvPicPr>
+          <p:cNvPr id="6" name="Graphic 5">
+            <a:extLst>
+              <a:ext uri="{FF2B5EF4-FFF2-40B4-BE49-F238E27FC236}">
+                <a16:creationId xmlns:a16="http://schemas.microsoft.com/office/drawing/2014/main" id="{6197C310-819F-D377-2FE1-A2AB9B6C1EE7}"/>
+              </a:ext>
+            </a:extLst>
+          </p:cNvPr>
+          <p:cNvPicPr>
+            <a:picLocks/>
+          </p:cNvPicPr>
+          <p:nvPr/>
+        </p:nvPicPr>
+        <p:blipFill>
+          <a:blip>
+            <a:extLst>
+              <a:ext uri="{96DAC541-7B7A-43D3-8B79-37D633B846F1}">
+                <asvg:svgBlip xmlns:asvg="http://schemas.microsoft.com/office/drawing/2016/SVG/main" r:embed="rId9"/>
+              </a:ext>
+            </a:extLst>
+          </a:blip>
+          <a:stretch>
+            <a:fillRect/>
+          </a:stretch>
+        </p:blipFill>
+        <p:spPr>
+          <a:xfrm>
+            <a:off x="296462" y="6190785"/>
+            <a:ext cx="296462" cy="296462"/>
+          </a:xfrm>
+          <a:prstGeom prst="rect">
+            <a:avLst/>
+          </a:prstGeom>
+        </p:spPr>
+      </p:pic>
+      <p:sp>
+        <p:nvSpPr>
+          <p:cNvPr id="7" name="Trapezoid 6">
+            <a:extLst>
+              <a:ext uri="{FF2B5EF4-FFF2-40B4-BE49-F238E27FC236}">
+                <a16:creationId xmlns:a16="http://schemas.microsoft.com/office/drawing/2014/main" id="{60C27DE2-C7CD-6789-6F46-01623CF7BFFB}"/>
+              </a:ext>
+            </a:extLst>
+          </p:cNvPr>
+          <p:cNvSpPr/>
+          <p:nvPr>
+            <p:custDataLst>
+              <p:tags r:id="rId5"/>
+            </p:custDataLst>
+          </p:nvPr>
+        </p:nvSpPr>
+        <p:spPr>
+          <a:xfrm rot="2700000">
+            <a:off x="9620371" y="514924"/>
+            <a:ext cx="3335198" cy="778213"/>
+          </a:xfrm>
+          <a:prstGeom prst="trapezoid">
+            <a:avLst>
+              <a:gd name="adj" fmla="val 100000"/>
+            </a:avLst>
+          </a:prstGeom>
+          <a:solidFill>
+            <a:srgbClr val="EDFAF2"/>
+          </a:solidFill>
+          <a:ln w="25400" cap="flat" cmpd="sng" algn="ctr">
+            <a:noFill/>
+            <a:prstDash val="solid"/>
+          </a:ln>
+          <a:effectLst/>
+          <a:extLst>
+            <a:ext uri="{91240B29-F687-4F45-9708-019B960494DF}">
+              <a14:hiddenLine xmlns:a14="http://schemas.microsoft.com/office/drawing/2010/main" w="25400" cap="flat" cmpd="sng" algn="ctr">
+                <a:solidFill>
+                  <a:schemeClr val="accent1">
+                    <a:shade val="15000"/>
+                  </a:schemeClr>
+                </a:solidFill>
+                <a:prstDash val="solid"/>
+              </a14:hiddenLine>
+            </a:ext>
+          </a:extLst>
+        </p:spPr>
+        <p:style>
+          <a:lnRef idx="2">
+            <a:schemeClr val="accent1">
+              <a:shade val="15000"/>
+            </a:schemeClr>
+          </a:lnRef>
+          <a:fillRef idx="1">
+            <a:schemeClr val="accent1"/>
+          </a:fillRef>
+          <a:effectRef idx="0">
+            <a:schemeClr val="accent1"/>
+          </a:effectRef>
+          <a:fontRef idx="minor">
+            <a:schemeClr val="lt1"/>
+          </a:fontRef>
+        </p:style>
+        <p:txBody>
+          <a:bodyPr tIns="0" bIns="0" rtlCol="0" anchor="t">
+            <a:normAutofit fontScale="70000" lnSpcReduction="20000"/>
+          </a:bodyPr>
+          <a:lstStyle/>
+          <a:p>
+            <a:pPr algn="ctr"/>
+            <a:r>
+              <a:rPr lang="en-US" sz="2600" b="1">
+                <a:solidFill>
+                  <a:srgbClr val="198038"/>
+                </a:solidFill>
+              </a:rPr>
+              <a:t>Do not edit
+</a:t>
+            </a:r>
+            <a:r>
+              <a:rPr lang="en-US" sz="2200">
+                <a:solidFill>
+                  <a:srgbClr val="198038"/>
+                </a:solidFill>
+                <a:hlinkClick r:id="rId10">
+                  <a:extLst>
+                    <a:ext uri="{A12FA001-AC4F-418D-AE19-62706E023703}">
+                      <ahyp:hlinkClr xmlns:ahyp="http://schemas.microsoft.com/office/drawing/2018/hyperlinkcolor" val="tx"/>
+                    </a:ext>
+                  </a:extLst>
+                </a:hlinkClick>
+              </a:rPr>
+              <a:t>How to change the design</a:t>
+            </a:r>
+            <a:endParaRPr lang="en-US" sz="2200">
+              <a:solidFill>
+                <a:srgbClr val="198038"/>
+              </a:solidFill>
+            </a:endParaRPr>
+          </a:p>
+        </p:txBody>
+      </p:sp>
+      <p:pic>
+        <p:nvPicPr>
+          <p:cNvPr id="9" name="Graphic 8">
+            <a:extLst>
+              <a:ext uri="{FF2B5EF4-FFF2-40B4-BE49-F238E27FC236}">
+                <a16:creationId xmlns:a16="http://schemas.microsoft.com/office/drawing/2014/main" id="{9CD1E78A-A8FA-C995-803E-129941DA4FC7}"/>
+              </a:ext>
+            </a:extLst>
+          </p:cNvPr>
+          <p:cNvPicPr>
+            <a:picLocks/>
+          </p:cNvPicPr>
+          <p:nvPr/>
+        </p:nvPicPr>
+        <p:blipFill>
+          <a:blip>
+            <a:extLst>
+              <a:ext uri="{96DAC541-7B7A-43D3-8B79-37D633B846F1}">
+                <asvg:svgBlip xmlns:asvg="http://schemas.microsoft.com/office/drawing/2016/SVG/main" r:embed="rId11"/>
+              </a:ext>
+            </a:extLst>
+          </a:blip>
+          <a:stretch>
+            <a:fillRect/>
+          </a:stretch>
+        </p:blipFill>
+        <p:spPr>
+          <a:xfrm>
+            <a:off x="10746748" y="6153727"/>
+            <a:ext cx="1111733" cy="370578"/>
+          </a:xfrm>
+          <a:prstGeom prst="rect">
+            <a:avLst/>
+          </a:prstGeom>
+        </p:spPr>
+      </p:pic>
+    </p:spTree>
+    <p:custDataLst>
+      <p:tags r:id="rId1"/>
+    </p:custDataLst>
+    <p:extLst>
+      <p:ext uri="{BB962C8B-B14F-4D97-AF65-F5344CB8AC3E}">
+        <p14:creationId xmlns:p14="http://schemas.microsoft.com/office/powerpoint/2010/main" val="623973386"/>
+      </p:ext>
+    </p:extLst>
+  </p:cSld>
+  <p:clrMapOvr>
+    <a:masterClrMapping/>
+  </p:clrMapOvr>
+  <p:timing>
+    <p:tnLst>
+      <p:par>
+        <p:cTn id="1" dur="indefinite" restart="never" nodeType="tmRoot">
+          <p:childTnLst>
+            <p:seq concurrent="1" nextAc="seek">
+              <p:cTn id="2" dur="indefinite" nodeType="mainSeq">
+                <p:childTnLst>
+                  <p:par>
+                    <p:cTn id="3" fill="hold">
+                      <p:stCondLst>
+                        <p:cond delay="indefinite"/>
+                      </p:stCondLst>
+                      <p:childTnLst>
+                        <p:par>
+                          <p:cTn id="4" fill="hold">
+                            <p:stCondLst>
+                              <p:cond delay="0"/>
+                            </p:stCondLst>
+                            <p:childTnLst>
+                              <p:par>
+                                <p:cTn id="5" presetID="26" presetClass="emph" presetSubtype="0" fill="hold" grpId="0" nodeType="clickEffect">
+                                  <p:stCondLst>
+                                    <p:cond delay="0"/>
+                                  </p:stCondLst>
+                                  <p:childTnLst>
+                                    <p:animEffect transition="out" filter="fade">
+                                      <p:cBhvr>
+                                        <p:cTn id="6" dur="50" tmFilter="0, 0; .2, .5; .8, .5; 1, 0"/>
+                                        <p:tgtEl>
+                                          <p:spTgt spid="3"/>
+                                        </p:tgtEl>
+                                      </p:cBhvr>
+                                    </p:animEffect>
+                                    <p:animScale>
+                                      <p:cBhvr>
+                                        <p:cTn id="7" dur="25" autoRev="1" fill="hold"/>
+                                        <p:tgtEl>
+                                          <p:spTgt spid="3"/>
+                                        </p:tgtEl>
+                                      </p:cBhvr>
+                                      <p:by x="105000" y="105000"/>
+                                    </p:animScale>
+                                  </p:childTnLst>
+                                </p:cTn>
+                              </p:par>
+                            </p:childTnLst>
+                          </p:cTn>
+                        </p:par>
+                      </p:childTnLst>
+                    </p:cTn>
+                  </p:par>
+                </p:childTnLst>
+              </p:cTn>
+              <p:prevCondLst>
+                <p:cond evt="onPrev" delay="0">
+                  <p:tgtEl>
+                    <p:sldTgt/>
+                  </p:tgtEl>
+                </p:cond>
+              </p:prevCondLst>
+              <p:nextCondLst>
+                <p:cond evt="onNext" delay="0">
+                  <p:tgtEl>
+                    <p:sldTgt/>
+                  </p:tgtEl>
+                </p:cond>
+              </p:nextCondLst>
+            </p:seq>
+          </p:childTnLst>
+        </p:cTn>
+      </p:par>
+    </p:tnLst>
+    <p:bldLst>
+      <p:bldP spid="3" grpId="0"/>
+    </p:bldLst>
+  </p:timing>
+</p:sld>
+</file>
+
+<file path=ppt/slides/slide40.xml><?xml version="1.0" encoding="utf-8"?>
 <p:sld xmlns:a="http://schemas.openxmlformats.org/drawingml/2006/main" xmlns:r="http://schemas.openxmlformats.org/officeDocument/2006/relationships" xmlns:p="http://schemas.openxmlformats.org/presentationml/2006/main">
   <p:cSld>
     <p:spTree>
@@ -35828,7 +35106,7 @@
 </p:sld>
 </file>
 
-<file path=ppt/slides/slide42.xml><?xml version="1.0" encoding="utf-8"?>
+<file path=ppt/slides/slide41.xml><?xml version="1.0" encoding="utf-8"?>
 <p:sld xmlns:a="http://schemas.openxmlformats.org/drawingml/2006/main" xmlns:r="http://schemas.openxmlformats.org/officeDocument/2006/relationships" xmlns:p="http://schemas.openxmlformats.org/presentationml/2006/main">
   <p:cSld>
     <p:spTree>
@@ -36967,7 +36245,7 @@
 </p:sld>
 </file>
 
-<file path=ppt/slides/slide43.xml><?xml version="1.0" encoding="utf-8"?>
+<file path=ppt/slides/slide42.xml><?xml version="1.0" encoding="utf-8"?>
 <p:sld xmlns:a="http://schemas.openxmlformats.org/drawingml/2006/main" xmlns:r="http://schemas.openxmlformats.org/officeDocument/2006/relationships" xmlns:p="http://schemas.openxmlformats.org/presentationml/2006/main">
   <p:cSld>
     <p:spTree>
@@ -38106,7 +37384,7 @@
 </p:sld>
 </file>
 
-<file path=ppt/slides/slide44.xml><?xml version="1.0" encoding="utf-8"?>
+<file path=ppt/slides/slide43.xml><?xml version="1.0" encoding="utf-8"?>
 <p:sld xmlns:a="http://schemas.openxmlformats.org/drawingml/2006/main" xmlns:r="http://schemas.openxmlformats.org/officeDocument/2006/relationships" xmlns:p="http://schemas.openxmlformats.org/presentationml/2006/main">
   <p:cSld>
     <p:spTree>
@@ -39519,7 +38797,7 @@
 </p:sld>
 </file>
 
-<file path=ppt/slides/slide45.xml><?xml version="1.0" encoding="utf-8"?>
+<file path=ppt/slides/slide44.xml><?xml version="1.0" encoding="utf-8"?>
 <p:sld xmlns:a="http://schemas.openxmlformats.org/drawingml/2006/main" xmlns:r="http://schemas.openxmlformats.org/officeDocument/2006/relationships" xmlns:p="http://schemas.openxmlformats.org/presentationml/2006/main">
   <p:cSld>
     <p:spTree>
@@ -40340,7 +39618,7 @@
 </p:sld>
 </file>
 
-<file path=ppt/slides/slide46.xml><?xml version="1.0" encoding="utf-8"?>
+<file path=ppt/slides/slide45.xml><?xml version="1.0" encoding="utf-8"?>
 <p:sld xmlns:a="http://schemas.openxmlformats.org/drawingml/2006/main" xmlns:r="http://schemas.openxmlformats.org/officeDocument/2006/relationships" xmlns:p="http://schemas.openxmlformats.org/presentationml/2006/main">
   <p:cSld>
     <p:spTree>
@@ -40570,7 +39848,7 @@
 </p:sld>
 </file>
 
-<file path=ppt/slides/slide47.xml><?xml version="1.0" encoding="utf-8"?>
+<file path=ppt/slides/slide46.xml><?xml version="1.0" encoding="utf-8"?>
 <p:sld xmlns:a="http://schemas.openxmlformats.org/drawingml/2006/main" xmlns:r="http://schemas.openxmlformats.org/officeDocument/2006/relationships" xmlns:p="http://schemas.openxmlformats.org/presentationml/2006/main">
   <p:cSld>
     <p:spTree>
@@ -40662,7 +39940,7 @@
 </p:sld>
 </file>
 
-<file path=ppt/slides/slide48.xml><?xml version="1.0" encoding="utf-8"?>
+<file path=ppt/slides/slide47.xml><?xml version="1.0" encoding="utf-8"?>
 <p:sld xmlns:a="http://schemas.openxmlformats.org/drawingml/2006/main" xmlns:r="http://schemas.openxmlformats.org/officeDocument/2006/relationships" xmlns:p="http://schemas.openxmlformats.org/presentationml/2006/main">
   <p:cSld>
     <p:spTree>
@@ -40771,7 +40049,7 @@
 </p:sld>
 </file>
 
-<file path=ppt/slides/slide49.xml><?xml version="1.0" encoding="utf-8"?>
+<file path=ppt/slides/slide48.xml><?xml version="1.0" encoding="utf-8"?>
 <p:sld xmlns:a="http://schemas.openxmlformats.org/drawingml/2006/main" xmlns:r="http://schemas.openxmlformats.org/officeDocument/2006/relationships" xmlns:p="http://schemas.openxmlformats.org/presentationml/2006/main">
   <p:cSld>
     <p:spTree>
@@ -41226,138 +40504,7 @@
 </p:sld>
 </file>
 
-<file path=ppt/slides/slide5.xml><?xml version="1.0" encoding="utf-8"?>
-<p:sld xmlns:a="http://schemas.openxmlformats.org/drawingml/2006/main" xmlns:r="http://schemas.openxmlformats.org/officeDocument/2006/relationships" xmlns:p="http://schemas.openxmlformats.org/presentationml/2006/main">
-  <p:cSld>
-    <p:spTree>
-      <p:nvGrpSpPr>
-        <p:cNvPr id="1" name=""/>
-        <p:cNvGrpSpPr/>
-        <p:nvPr/>
-      </p:nvGrpSpPr>
-      <p:grpSpPr>
-        <a:xfrm>
-          <a:off x="0" y="0"/>
-          <a:ext cx="0" cy="0"/>
-          <a:chOff x="0" y="0"/>
-          <a:chExt cx="0" cy="0"/>
-        </a:xfrm>
-      </p:grpSpPr>
-      <p:sp>
-        <p:nvSpPr>
-          <p:cNvPr id="2" name="Title 1">
-            <a:extLst>
-              <a:ext uri="{FF2B5EF4-FFF2-40B4-BE49-F238E27FC236}">
-                <a16:creationId xmlns:a16="http://schemas.microsoft.com/office/drawing/2014/main" id="{A073B702-ED77-884E-88F7-92D73313F38D}"/>
-              </a:ext>
-            </a:extLst>
-          </p:cNvPr>
-          <p:cNvSpPr>
-            <a:spLocks noGrp="1"/>
-          </p:cNvSpPr>
-          <p:nvPr>
-            <p:ph type="title"/>
-          </p:nvPr>
-        </p:nvSpPr>
-        <p:spPr/>
-        <p:txBody>
-          <a:bodyPr/>
-          <a:lstStyle/>
-          <a:p>
-            <a:r>
-              <a:rPr lang="en-US" dirty="0"/>
-              <a:t>Plan for the week</a:t>
-            </a:r>
-          </a:p>
-        </p:txBody>
-      </p:sp>
-      <p:sp>
-        <p:nvSpPr>
-          <p:cNvPr id="3" name="Text Placeholder 2">
-            <a:extLst>
-              <a:ext uri="{FF2B5EF4-FFF2-40B4-BE49-F238E27FC236}">
-                <a16:creationId xmlns:a16="http://schemas.microsoft.com/office/drawing/2014/main" id="{7861BAD4-F7FB-1D48-9D37-2273592A75CE}"/>
-              </a:ext>
-            </a:extLst>
-          </p:cNvPr>
-          <p:cNvSpPr>
-            <a:spLocks noGrp="1"/>
-          </p:cNvSpPr>
-          <p:nvPr>
-            <p:ph type="body" idx="1"/>
-          </p:nvPr>
-        </p:nvSpPr>
-        <p:spPr/>
-        <p:txBody>
-          <a:bodyPr/>
-          <a:lstStyle/>
-          <a:p>
-            <a:r>
-              <a:rPr lang="en-US" dirty="0"/>
-              <a:t>What you should be discussing this week within your team</a:t>
-            </a:r>
-          </a:p>
-          <a:p>
-            <a:pPr lvl="1"/>
-            <a:r>
-              <a:rPr lang="en-US" dirty="0"/>
-              <a:t>Finalizing your analytical formulation and baselines to compare against</a:t>
-            </a:r>
-          </a:p>
-          <a:p>
-            <a:pPr lvl="1"/>
-            <a:r>
-              <a:rPr lang="en-US" dirty="0"/>
-              <a:t>Validation strategy</a:t>
-            </a:r>
-          </a:p>
-          <a:p>
-            <a:pPr lvl="1"/>
-            <a:endParaRPr lang="en-US" dirty="0"/>
-          </a:p>
-          <a:p>
-            <a:r>
-              <a:rPr lang="en-US" dirty="0"/>
-              <a:t>What you should be building this week</a:t>
-            </a:r>
-          </a:p>
-          <a:p>
-            <a:pPr lvl="1"/>
-            <a:r>
-              <a:rPr lang="en-US" dirty="0"/>
-              <a:t>V0 of your ML pipeline</a:t>
-            </a:r>
-          </a:p>
-          <a:p>
-            <a:pPr lvl="1"/>
-            <a:r>
-              <a:rPr lang="en-US" dirty="0"/>
-              <a:t>Training/validation logic</a:t>
-            </a:r>
-          </a:p>
-          <a:p>
-            <a:pPr lvl="1"/>
-            <a:r>
-              <a:rPr lang="en-US" dirty="0"/>
-              <a:t>Implemented Baselines</a:t>
-            </a:r>
-          </a:p>
-        </p:txBody>
-      </p:sp>
-    </p:spTree>
-    <p:extLst>
-      <p:ext uri="{BB962C8B-B14F-4D97-AF65-F5344CB8AC3E}">
-        <p14:creationId xmlns:p14="http://schemas.microsoft.com/office/powerpoint/2010/main" val="2336692870"/>
-      </p:ext>
-    </p:extLst>
-  </p:cSld>
-  <p:clrMapOvr>
-    <a:masterClrMapping/>
-  </p:clrMapOvr>
-</p:sld>
-</file>
-
-<file path=ppt/slides/slide50.xml><?xml version="1.0" encoding="utf-8"?>
+<file path=ppt/slides/slide49.xml><?xml version="1.0" encoding="utf-8"?>
 <p:sld xmlns:a="http://schemas.openxmlformats.org/drawingml/2006/main" xmlns:r="http://schemas.openxmlformats.org/officeDocument/2006/relationships" xmlns:p="http://schemas.openxmlformats.org/presentationml/2006/main">
   <p:cSld>
     <p:spTree>
@@ -41486,7 +40633,7 @@
 </p:sld>
 </file>
 
-<file path=ppt/slides/slide6.xml><?xml version="1.0" encoding="utf-8"?>
+<file path=ppt/slides/slide5.xml><?xml version="1.0" encoding="utf-8"?>
 <p:sld xmlns:a="http://schemas.openxmlformats.org/drawingml/2006/main" xmlns:r="http://schemas.openxmlformats.org/officeDocument/2006/relationships" xmlns:p="http://schemas.openxmlformats.org/presentationml/2006/main">
   <p:cSld>
     <p:spTree>
@@ -41615,7 +40762,7 @@
 </p:sld>
 </file>
 
-<file path=ppt/slides/slide7.xml><?xml version="1.0" encoding="utf-8"?>
+<file path=ppt/slides/slide6.xml><?xml version="1.0" encoding="utf-8"?>
 <p:sld xmlns:a="http://schemas.openxmlformats.org/drawingml/2006/main" xmlns:r="http://schemas.openxmlformats.org/officeDocument/2006/relationships" xmlns:p="http://schemas.openxmlformats.org/presentationml/2006/main">
   <p:cSld>
     <p:spTree>
@@ -41760,7 +40907,7 @@
 </p:sld>
 </file>
 
-<file path=ppt/slides/slide8.xml><?xml version="1.0" encoding="utf-8"?>
+<file path=ppt/slides/slide7.xml><?xml version="1.0" encoding="utf-8"?>
 <p:sld xmlns:a="http://schemas.openxmlformats.org/drawingml/2006/main" xmlns:r="http://schemas.openxmlformats.org/officeDocument/2006/relationships" xmlns:p="http://schemas.openxmlformats.org/presentationml/2006/main">
   <p:cSld>
     <p:spTree>
@@ -41826,7 +40973,22 @@
           <a:bodyPr/>
           <a:lstStyle/>
           <a:p>
-            <a:endParaRPr lang="en-US"/>
+            <a:r>
+              <a:rPr lang="en-US" dirty="0"/>
+              <a:t>You’ve run a large number of different types of models varying model types, hyperparameters, features, … (other decisions in the pipeline)</a:t>
+            </a:r>
+          </a:p>
+          <a:p>
+            <a:endParaRPr lang="en-US" dirty="0"/>
+          </a:p>
+          <a:p>
+            <a:r>
+              <a:rPr lang="en-US" dirty="0"/>
+              <a:t>Now we need to ?</a:t>
+            </a:r>
+          </a:p>
+          <a:p>
+            <a:endParaRPr lang="en-US" dirty="0"/>
           </a:p>
         </p:txBody>
       </p:sp>
@@ -41843,7 +41005,7 @@
 </p:sld>
 </file>
 
-<file path=ppt/slides/slide9.xml><?xml version="1.0" encoding="utf-8"?>
+<file path=ppt/slides/slide8.xml><?xml version="1.0" encoding="utf-8"?>
 <p:sld xmlns:a="http://schemas.openxmlformats.org/drawingml/2006/main" xmlns:r="http://schemas.openxmlformats.org/officeDocument/2006/relationships" xmlns:p="http://schemas.openxmlformats.org/presentationml/2006/main">
   <p:cSld>
     <p:spTree>
@@ -41899,7 +41061,7 @@
           <a:p>
             <a:r>
               <a:rPr lang="en-US" sz="2800" dirty="0"/>
-              <a:t>You’ve run a large number of different types of models varying model types, hyperparameters, features, … (other decisions in the pipeline)</a:t>
+              <a:t>You’ve run a large number of different types of models varying model types, hyperparameters, features, … (other decisions in the pipeline such as FMs only or FMs + Fine-tuning, etc.)</a:t>
             </a:r>
           </a:p>
           <a:p>
@@ -41944,20 +41106,118 @@
 </p:sld>
 </file>
 
+<file path=ppt/slides/slide9.xml><?xml version="1.0" encoding="utf-8"?>
+<p:sld xmlns:a="http://schemas.openxmlformats.org/drawingml/2006/main" xmlns:r="http://schemas.openxmlformats.org/officeDocument/2006/relationships" xmlns:p="http://schemas.openxmlformats.org/presentationml/2006/main">
+  <p:cSld>
+    <p:spTree>
+      <p:nvGrpSpPr>
+        <p:cNvPr id="1" name=""/>
+        <p:cNvGrpSpPr/>
+        <p:nvPr/>
+      </p:nvGrpSpPr>
+      <p:grpSpPr>
+        <a:xfrm>
+          <a:off x="0" y="0"/>
+          <a:ext cx="0" cy="0"/>
+          <a:chOff x="0" y="0"/>
+          <a:chExt cx="0" cy="0"/>
+        </a:xfrm>
+      </p:grpSpPr>
+      <p:sp>
+        <p:nvSpPr>
+          <p:cNvPr id="4" name="Title 3">
+            <a:extLst>
+              <a:ext uri="{FF2B5EF4-FFF2-40B4-BE49-F238E27FC236}">
+                <a16:creationId xmlns:a16="http://schemas.microsoft.com/office/drawing/2014/main" id="{30C2C959-72F2-EF4D-80DA-F48A29D0F3C4}"/>
+              </a:ext>
+            </a:extLst>
+          </p:cNvPr>
+          <p:cNvSpPr>
+            <a:spLocks noGrp="1"/>
+          </p:cNvSpPr>
+          <p:nvPr>
+            <p:ph type="title"/>
+          </p:nvPr>
+        </p:nvSpPr>
+        <p:spPr/>
+        <p:txBody>
+          <a:bodyPr/>
+          <a:lstStyle/>
+          <a:p>
+            <a:r>
+              <a:rPr lang="en-US" dirty="0"/>
+              <a:t>What do we need our selected model to do?</a:t>
+            </a:r>
+          </a:p>
+        </p:txBody>
+      </p:sp>
+      <p:sp>
+        <p:nvSpPr>
+          <p:cNvPr id="3" name="Text Placeholder 2">
+            <a:extLst>
+              <a:ext uri="{FF2B5EF4-FFF2-40B4-BE49-F238E27FC236}">
+                <a16:creationId xmlns:a16="http://schemas.microsoft.com/office/drawing/2014/main" id="{DA13BAFF-48B6-9046-94F3-CBF50B2F21D8}"/>
+              </a:ext>
+            </a:extLst>
+          </p:cNvPr>
+          <p:cNvSpPr>
+            <a:spLocks noGrp="1"/>
+          </p:cNvSpPr>
+          <p:nvPr>
+            <p:ph type="body" idx="1"/>
+          </p:nvPr>
+        </p:nvSpPr>
+        <p:spPr/>
+        <p:txBody>
+          <a:bodyPr/>
+          <a:lstStyle/>
+          <a:p>
+            <a:r>
+              <a:rPr lang="en-US" dirty="0"/>
+              <a:t>poll</a:t>
+            </a:r>
+          </a:p>
+        </p:txBody>
+      </p:sp>
+    </p:spTree>
+    <p:extLst>
+      <p:ext uri="{BB962C8B-B14F-4D97-AF65-F5344CB8AC3E}">
+        <p14:creationId xmlns:p14="http://schemas.microsoft.com/office/powerpoint/2010/main" val="106807354"/>
+      </p:ext>
+    </p:extLst>
+  </p:cSld>
+  <p:clrMapOvr>
+    <a:masterClrMapping/>
+  </p:clrMapOvr>
+  <mc:AlternateContent xmlns:mc="http://schemas.openxmlformats.org/markup-compatibility/2006" xmlns:p14="http://schemas.microsoft.com/office/powerpoint/2010/main">
+    <mc:Choice Requires="p14">
+      <p:transition spd="med" p14:dur="700">
+        <p:fade/>
+      </p:transition>
+    </mc:Choice>
+    <mc:Fallback xmlns="">
+      <p:transition spd="med">
+        <p:fade/>
+      </p:transition>
+    </mc:Fallback>
+  </mc:AlternateContent>
+</p:sld>
+</file>
+
 <file path=ppt/tags/tag1.xml><?xml version="1.0" encoding="utf-8"?>
 <p:tagLst xmlns:a="http://schemas.openxmlformats.org/drawingml/2006/main" xmlns:r="http://schemas.openxmlformats.org/officeDocument/2006/relationships" xmlns:p="http://schemas.openxmlformats.org/presentationml/2006/main">
   <p:tag name="SLIDO_APP_VERSION" val="1.5.0.0"/>
   <p:tag name="SLIDO_PRESENTATION_ID" val="50507a95-7a63-4367-8c97-db53aaefbe10"/>
-  <p:tag name="SLIDO_EVENT_UUID" val="0161bee7-9b52-48ab-bd01-308fc07c8a33"/>
-  <p:tag name="SLIDO_EVENT_SECTION_UUID" val="53f7b2fd-9b37-4ce9-89ff-a9a7d9b782ad"/>
+  <p:tag name="SLIDO_EVENT_UUID" val="6b8f259d-64a0-4275-9f95-7c545980aae7"/>
+  <p:tag name="SLIDO_EVENT_SECTION_UUID" val="caea6fdf-73fa-44cd-8326-d8eb13d1beb4"/>
 </p:tagLst>
 </file>
 
 <file path=ppt/tags/tag2.xml><?xml version="1.0" encoding="utf-8"?>
 <p:tagLst xmlns:a="http://schemas.openxmlformats.org/drawingml/2006/main" xmlns:r="http://schemas.openxmlformats.org/officeDocument/2006/relationships" xmlns:p="http://schemas.openxmlformats.org/presentationml/2006/main">
   <p:tag name="SLIDO_TYPE" val="SlidoPoll"/>
-  <p:tag name="SLIDO_POLL_UUID" val="6b292296-726c-49bc-ac75-c7dbd83efea8"/>
-  <p:tag name="SLIDO_TIMELINE" val="W3sic2hvd1Jlc3VsdHMiOmZhbHNlLCJwb2xsUXVlc3Rpb25VdWlkIjoiNjMwNWVlNGItZmJmZS00YTQ2LWE3MGItMGM0NWMwMmJmMzFiIn0seyJwb2xsUXVlc3Rpb25VdWlkIjoiNjMwNWVlNGItZmJmZS00YTQ2LWE3MGItMGM0NWMwMmJmMzFiIiwic2hvd1Jlc3VsdHMiOnRydWV9XQ=="/>
+  <p:tag name="SLIDO_POLL_UUID" val="c1985364-9222-4031-ab2b-9330b6ee8641"/>
+  <p:tag name="SLIDO_TIMELINE" val="W3sic2hvd1Jlc3VsdHMiOmZhbHNlLCJwb2xsUXVlc3Rpb25VdWlkIjoiZDNhYTBkYWUtYmM1Yi00YWY4LWE3M2QtNzcxODc2ZjZhY2Q1In0seyJzaG93UmVzdWx0cyI6dHJ1ZSwicG9sbFF1ZXN0aW9uVXVpZCI6ImQzYWEwZGFlLWJjNWItNGFmOC1hNzNkLTc3MTg3NmY2YWNkNSJ9XQ=="/>
 </p:tagLst>
 </file>
 
@@ -41976,22 +41236,13 @@
 
 <file path=ppt/tags/tag5.xml><?xml version="1.0" encoding="utf-8"?>
 <p:tagLst xmlns:a="http://schemas.openxmlformats.org/drawingml/2006/main" xmlns:r="http://schemas.openxmlformats.org/officeDocument/2006/relationships" xmlns:p="http://schemas.openxmlformats.org/presentationml/2006/main">
-  <p:tag name="SLIDO_TYPE" val="SlidoPoll"/>
-  <p:tag name="SLIDO_POLL_UUID" val="7fdb6c13-66a1-4811-a773-de0bd8a0aa08"/>
-  <p:tag name="SLIDO_TIMELINE" val="W3sicG9sbFF1ZXN0aW9uVXVpZCI6ImI0YWJiMTI0LTk3MjMtNGExMy1iMDQ4LTlkNTIxYmMwMGM5NyIsInNob3dSZXN1bHRzIjpmYWxzZX0seyJwb2xsUXVlc3Rpb25VdWlkIjoiYjRhYmIxMjQtOTcyMy00YTEzLWIwNDgtOWQ1MjFiYzAwYzk3Iiwic2hvd1Jlc3VsdHMiOnRydWV9XQ=="/>
+  <p:tag name="SLIDO_ELEMENT" val="footer"/>
 </p:tagLst>
 </file>
 
 <file path=ppt/tags/tag6.xml><?xml version="1.0" encoding="utf-8"?>
 <p:tagLst xmlns:a="http://schemas.openxmlformats.org/drawingml/2006/main" xmlns:r="http://schemas.openxmlformats.org/officeDocument/2006/relationships" xmlns:p="http://schemas.openxmlformats.org/presentationml/2006/main">
-  <p:tag name="SLIDO_ELEMENT" val="interaction_image"/>
-  <p:tag name="INTERACTION_TYPE" val="MultipleChoice"/>
-</p:tagLst>
-</file>
-
-<file path=ppt/tags/tag7.xml><?xml version="1.0" encoding="utf-8"?>
-<p:tagLst xmlns:a="http://schemas.openxmlformats.org/drawingml/2006/main" xmlns:r="http://schemas.openxmlformats.org/officeDocument/2006/relationships" xmlns:p="http://schemas.openxmlformats.org/presentationml/2006/main">
-  <p:tag name="SLIDO_ELEMENT" val="title"/>
+  <p:tag name="SLIDO_ELEMENT" val="corner"/>
 </p:tagLst>
 </file>
 
